--- a/tools/FreeP.RenderCompare/corpus/04-picture.pptx
+++ b/tools/FreeP.RenderCompare/corpus/04-picture.pptx
@@ -129,7 +129,7 @@
           <p:cNvPr id="2" name="Title 1">
             <a:extLst>
               <a:ext uri="{FF2B5EF4-FFF2-40B4-BE49-F238E27FC236}">
-                <a16:creationId xmlns:a16="http://schemas.microsoft.com/office/drawing/2014/main" id="{8A862DD4-C789-BB8B-CB3D-25BDEA130FCD}"/>
+                <a16:creationId xmlns:a16="http://schemas.microsoft.com/office/drawing/2014/main" id="{B6A0306D-FF1A-D356-00B1-28949A8764BC}"/>
               </a:ext>
             </a:extLst>
           </p:cNvPr>
@@ -166,7 +166,7 @@
           <p:cNvPr id="3" name="Subtitle 2">
             <a:extLst>
               <a:ext uri="{FF2B5EF4-FFF2-40B4-BE49-F238E27FC236}">
-                <a16:creationId xmlns:a16="http://schemas.microsoft.com/office/drawing/2014/main" id="{C4C65EF2-6BB8-B029-1A5A-71677FC63E93}"/>
+                <a16:creationId xmlns:a16="http://schemas.microsoft.com/office/drawing/2014/main" id="{DD3680C7-1BCB-33D6-CB3F-5C003DACCC9A}"/>
               </a:ext>
             </a:extLst>
           </p:cNvPr>
@@ -236,7 +236,7 @@
           <p:cNvPr id="4" name="Date Placeholder 3">
             <a:extLst>
               <a:ext uri="{FF2B5EF4-FFF2-40B4-BE49-F238E27FC236}">
-                <a16:creationId xmlns:a16="http://schemas.microsoft.com/office/drawing/2014/main" id="{A24F5064-DFC9-22B4-D525-63CE1B8E2A1B}"/>
+                <a16:creationId xmlns:a16="http://schemas.microsoft.com/office/drawing/2014/main" id="{658CDC1F-CDCE-B652-EA8B-5B3A958AC62C}"/>
               </a:ext>
             </a:extLst>
           </p:cNvPr>
@@ -252,7 +252,7 @@
           <a:bodyPr/>
           <a:lstStyle/>
           <a:p>
-            <a:fld id="{628E13F0-7675-4AE9-84E8-78CA07F33BCD}" type="datetimeFigureOut">
+            <a:fld id="{93955E2D-8DBF-4645-9168-FD7B691BF237}" type="datetimeFigureOut">
               <a:rPr lang="en-US" smtClean="0"/>
               <a:t>6/25/2026</a:t>
             </a:fld>
@@ -265,7 +265,7 @@
           <p:cNvPr id="5" name="Footer Placeholder 4">
             <a:extLst>
               <a:ext uri="{FF2B5EF4-FFF2-40B4-BE49-F238E27FC236}">
-                <a16:creationId xmlns:a16="http://schemas.microsoft.com/office/drawing/2014/main" id="{68DCEE57-396A-8811-1B2F-29E757A1DE63}"/>
+                <a16:creationId xmlns:a16="http://schemas.microsoft.com/office/drawing/2014/main" id="{1E07F6E6-BD06-4C7E-4A1E-C5C505442FF2}"/>
               </a:ext>
             </a:extLst>
           </p:cNvPr>
@@ -290,7 +290,7 @@
           <p:cNvPr id="6" name="Slide Number Placeholder 5">
             <a:extLst>
               <a:ext uri="{FF2B5EF4-FFF2-40B4-BE49-F238E27FC236}">
-                <a16:creationId xmlns:a16="http://schemas.microsoft.com/office/drawing/2014/main" id="{C715B1E0-F285-DAC2-E391-421CB851C3AA}"/>
+                <a16:creationId xmlns:a16="http://schemas.microsoft.com/office/drawing/2014/main" id="{96D6DBF6-6EC7-5279-2171-0F4FC0D90729}"/>
               </a:ext>
             </a:extLst>
           </p:cNvPr>
@@ -306,7 +306,7 @@
           <a:bodyPr/>
           <a:lstStyle/>
           <a:p>
-            <a:fld id="{23FD4D9C-AC70-4D05-AEBA-6D2EF8343C9E}" type="slidenum">
+            <a:fld id="{8286AFE5-9E18-4557-886E-3E84579CFD30}" type="slidenum">
               <a:rPr lang="en-US" smtClean="0"/>
               <a:t>‹#›</a:t>
             </a:fld>
@@ -317,7 +317,7 @@
     </p:spTree>
     <p:extLst>
       <p:ext uri="{BB962C8B-B14F-4D97-AF65-F5344CB8AC3E}">
-        <p14:creationId xmlns:p14="http://schemas.microsoft.com/office/powerpoint/2010/main" val="1159517834"/>
+        <p14:creationId xmlns:p14="http://schemas.microsoft.com/office/powerpoint/2010/main" val="3767774199"/>
       </p:ext>
     </p:extLst>
   </p:cSld>
@@ -349,7 +349,7 @@
           <p:cNvPr id="2" name="Title 1">
             <a:extLst>
               <a:ext uri="{FF2B5EF4-FFF2-40B4-BE49-F238E27FC236}">
-                <a16:creationId xmlns:a16="http://schemas.microsoft.com/office/drawing/2014/main" id="{8A7033A7-AC0F-C5E4-57EF-F65983736B90}"/>
+                <a16:creationId xmlns:a16="http://schemas.microsoft.com/office/drawing/2014/main" id="{599FCC46-4917-57AA-20DA-7604C8B47EB3}"/>
               </a:ext>
             </a:extLst>
           </p:cNvPr>
@@ -377,7 +377,7 @@
           <p:cNvPr id="3" name="Vertical Text Placeholder 2">
             <a:extLst>
               <a:ext uri="{FF2B5EF4-FFF2-40B4-BE49-F238E27FC236}">
-                <a16:creationId xmlns:a16="http://schemas.microsoft.com/office/drawing/2014/main" id="{46D668F8-ED0F-85C0-7116-905801FFB438}"/>
+                <a16:creationId xmlns:a16="http://schemas.microsoft.com/office/drawing/2014/main" id="{5F1FD2C6-D183-FE0E-1D3B-9747E0830D82}"/>
               </a:ext>
             </a:extLst>
           </p:cNvPr>
@@ -434,7 +434,7 @@
           <p:cNvPr id="4" name="Date Placeholder 3">
             <a:extLst>
               <a:ext uri="{FF2B5EF4-FFF2-40B4-BE49-F238E27FC236}">
-                <a16:creationId xmlns:a16="http://schemas.microsoft.com/office/drawing/2014/main" id="{D8A34631-9183-DC9F-BFA6-F1C29533E823}"/>
+                <a16:creationId xmlns:a16="http://schemas.microsoft.com/office/drawing/2014/main" id="{978ED489-4BAE-0FD0-7216-C0201A245065}"/>
               </a:ext>
             </a:extLst>
           </p:cNvPr>
@@ -450,7 +450,7 @@
           <a:bodyPr/>
           <a:lstStyle/>
           <a:p>
-            <a:fld id="{628E13F0-7675-4AE9-84E8-78CA07F33BCD}" type="datetimeFigureOut">
+            <a:fld id="{93955E2D-8DBF-4645-9168-FD7B691BF237}" type="datetimeFigureOut">
               <a:rPr lang="en-US" smtClean="0"/>
               <a:t>6/25/2026</a:t>
             </a:fld>
@@ -463,7 +463,7 @@
           <p:cNvPr id="5" name="Footer Placeholder 4">
             <a:extLst>
               <a:ext uri="{FF2B5EF4-FFF2-40B4-BE49-F238E27FC236}">
-                <a16:creationId xmlns:a16="http://schemas.microsoft.com/office/drawing/2014/main" id="{CEC478A7-ABD6-72EA-F005-22FE60D18E26}"/>
+                <a16:creationId xmlns:a16="http://schemas.microsoft.com/office/drawing/2014/main" id="{BC33408B-F30B-3DC5-9E63-7F602E6F71EA}"/>
               </a:ext>
             </a:extLst>
           </p:cNvPr>
@@ -488,7 +488,7 @@
           <p:cNvPr id="6" name="Slide Number Placeholder 5">
             <a:extLst>
               <a:ext uri="{FF2B5EF4-FFF2-40B4-BE49-F238E27FC236}">
-                <a16:creationId xmlns:a16="http://schemas.microsoft.com/office/drawing/2014/main" id="{2224471F-2F5D-6CDE-17D1-FA834401CA68}"/>
+                <a16:creationId xmlns:a16="http://schemas.microsoft.com/office/drawing/2014/main" id="{E6B7AE24-3615-E26B-8379-084F6704CAC6}"/>
               </a:ext>
             </a:extLst>
           </p:cNvPr>
@@ -504,7 +504,7 @@
           <a:bodyPr/>
           <a:lstStyle/>
           <a:p>
-            <a:fld id="{23FD4D9C-AC70-4D05-AEBA-6D2EF8343C9E}" type="slidenum">
+            <a:fld id="{8286AFE5-9E18-4557-886E-3E84579CFD30}" type="slidenum">
               <a:rPr lang="en-US" smtClean="0"/>
               <a:t>‹#›</a:t>
             </a:fld>
@@ -515,7 +515,7 @@
     </p:spTree>
     <p:extLst>
       <p:ext uri="{BB962C8B-B14F-4D97-AF65-F5344CB8AC3E}">
-        <p14:creationId xmlns:p14="http://schemas.microsoft.com/office/powerpoint/2010/main" val="131441632"/>
+        <p14:creationId xmlns:p14="http://schemas.microsoft.com/office/powerpoint/2010/main" val="2659428246"/>
       </p:ext>
     </p:extLst>
   </p:cSld>
@@ -547,7 +547,7 @@
           <p:cNvPr id="2" name="Vertical Title 1">
             <a:extLst>
               <a:ext uri="{FF2B5EF4-FFF2-40B4-BE49-F238E27FC236}">
-                <a16:creationId xmlns:a16="http://schemas.microsoft.com/office/drawing/2014/main" id="{8B2E229D-D203-CAD1-0214-8F91680D921A}"/>
+                <a16:creationId xmlns:a16="http://schemas.microsoft.com/office/drawing/2014/main" id="{DE412454-7B9F-85B1-2B36-09D046892A6A}"/>
               </a:ext>
             </a:extLst>
           </p:cNvPr>
@@ -580,7 +580,7 @@
           <p:cNvPr id="3" name="Vertical Text Placeholder 2">
             <a:extLst>
               <a:ext uri="{FF2B5EF4-FFF2-40B4-BE49-F238E27FC236}">
-                <a16:creationId xmlns:a16="http://schemas.microsoft.com/office/drawing/2014/main" id="{7D185EA8-486C-A4F5-6FF1-C4B13E9F26EA}"/>
+                <a16:creationId xmlns:a16="http://schemas.microsoft.com/office/drawing/2014/main" id="{BD6D4C78-BF9C-A258-1A8C-D734FE0000DE}"/>
               </a:ext>
             </a:extLst>
           </p:cNvPr>
@@ -642,7 +642,7 @@
           <p:cNvPr id="4" name="Date Placeholder 3">
             <a:extLst>
               <a:ext uri="{FF2B5EF4-FFF2-40B4-BE49-F238E27FC236}">
-                <a16:creationId xmlns:a16="http://schemas.microsoft.com/office/drawing/2014/main" id="{36A83C57-0D63-778E-9C1F-D87E854FFB47}"/>
+                <a16:creationId xmlns:a16="http://schemas.microsoft.com/office/drawing/2014/main" id="{FC061A71-6EDB-E48A-1638-11A4A60D0D64}"/>
               </a:ext>
             </a:extLst>
           </p:cNvPr>
@@ -658,7 +658,7 @@
           <a:bodyPr/>
           <a:lstStyle/>
           <a:p>
-            <a:fld id="{628E13F0-7675-4AE9-84E8-78CA07F33BCD}" type="datetimeFigureOut">
+            <a:fld id="{93955E2D-8DBF-4645-9168-FD7B691BF237}" type="datetimeFigureOut">
               <a:rPr lang="en-US" smtClean="0"/>
               <a:t>6/25/2026</a:t>
             </a:fld>
@@ -671,7 +671,7 @@
           <p:cNvPr id="5" name="Footer Placeholder 4">
             <a:extLst>
               <a:ext uri="{FF2B5EF4-FFF2-40B4-BE49-F238E27FC236}">
-                <a16:creationId xmlns:a16="http://schemas.microsoft.com/office/drawing/2014/main" id="{6B440D4A-9F56-D776-5BDE-2EBC2CF0E04C}"/>
+                <a16:creationId xmlns:a16="http://schemas.microsoft.com/office/drawing/2014/main" id="{D6E43A65-CCF1-CD4C-0393-EFC4EC1F9CF8}"/>
               </a:ext>
             </a:extLst>
           </p:cNvPr>
@@ -696,7 +696,7 @@
           <p:cNvPr id="6" name="Slide Number Placeholder 5">
             <a:extLst>
               <a:ext uri="{FF2B5EF4-FFF2-40B4-BE49-F238E27FC236}">
-                <a16:creationId xmlns:a16="http://schemas.microsoft.com/office/drawing/2014/main" id="{6B897CF3-BDE1-269E-2C1D-8F6671CC2517}"/>
+                <a16:creationId xmlns:a16="http://schemas.microsoft.com/office/drawing/2014/main" id="{4C4D2C80-E4BD-E879-0332-AE149E2B4EB3}"/>
               </a:ext>
             </a:extLst>
           </p:cNvPr>
@@ -712,7 +712,7 @@
           <a:bodyPr/>
           <a:lstStyle/>
           <a:p>
-            <a:fld id="{23FD4D9C-AC70-4D05-AEBA-6D2EF8343C9E}" type="slidenum">
+            <a:fld id="{8286AFE5-9E18-4557-886E-3E84579CFD30}" type="slidenum">
               <a:rPr lang="en-US" smtClean="0"/>
               <a:t>‹#›</a:t>
             </a:fld>
@@ -723,7 +723,7 @@
     </p:spTree>
     <p:extLst>
       <p:ext uri="{BB962C8B-B14F-4D97-AF65-F5344CB8AC3E}">
-        <p14:creationId xmlns:p14="http://schemas.microsoft.com/office/powerpoint/2010/main" val="1081824430"/>
+        <p14:creationId xmlns:p14="http://schemas.microsoft.com/office/powerpoint/2010/main" val="512883601"/>
       </p:ext>
     </p:extLst>
   </p:cSld>
@@ -755,7 +755,7 @@
           <p:cNvPr id="2" name="Title 1">
             <a:extLst>
               <a:ext uri="{FF2B5EF4-FFF2-40B4-BE49-F238E27FC236}">
-                <a16:creationId xmlns:a16="http://schemas.microsoft.com/office/drawing/2014/main" id="{ADCE8ECC-3401-F7CB-158C-BBE6DB5E63BF}"/>
+                <a16:creationId xmlns:a16="http://schemas.microsoft.com/office/drawing/2014/main" id="{96AA6EA1-3E89-FA5F-C4DD-4766CEFDCD3B}"/>
               </a:ext>
             </a:extLst>
           </p:cNvPr>
@@ -783,7 +783,7 @@
           <p:cNvPr id="3" name="Content Placeholder 2">
             <a:extLst>
               <a:ext uri="{FF2B5EF4-FFF2-40B4-BE49-F238E27FC236}">
-                <a16:creationId xmlns:a16="http://schemas.microsoft.com/office/drawing/2014/main" id="{EA5FD277-1609-8E98-1446-6BFA2475FA37}"/>
+                <a16:creationId xmlns:a16="http://schemas.microsoft.com/office/drawing/2014/main" id="{42FB8648-564F-95B1-FC5E-5A159C4A8800}"/>
               </a:ext>
             </a:extLst>
           </p:cNvPr>
@@ -840,7 +840,7 @@
           <p:cNvPr id="4" name="Date Placeholder 3">
             <a:extLst>
               <a:ext uri="{FF2B5EF4-FFF2-40B4-BE49-F238E27FC236}">
-                <a16:creationId xmlns:a16="http://schemas.microsoft.com/office/drawing/2014/main" id="{B8E311C5-6FD2-6302-BDF0-96174B1DF7A5}"/>
+                <a16:creationId xmlns:a16="http://schemas.microsoft.com/office/drawing/2014/main" id="{0BA8A725-67E2-F4B7-0224-E18FC6DEEEA0}"/>
               </a:ext>
             </a:extLst>
           </p:cNvPr>
@@ -856,7 +856,7 @@
           <a:bodyPr/>
           <a:lstStyle/>
           <a:p>
-            <a:fld id="{628E13F0-7675-4AE9-84E8-78CA07F33BCD}" type="datetimeFigureOut">
+            <a:fld id="{93955E2D-8DBF-4645-9168-FD7B691BF237}" type="datetimeFigureOut">
               <a:rPr lang="en-US" smtClean="0"/>
               <a:t>6/25/2026</a:t>
             </a:fld>
@@ -869,7 +869,7 @@
           <p:cNvPr id="5" name="Footer Placeholder 4">
             <a:extLst>
               <a:ext uri="{FF2B5EF4-FFF2-40B4-BE49-F238E27FC236}">
-                <a16:creationId xmlns:a16="http://schemas.microsoft.com/office/drawing/2014/main" id="{A5EC6C4E-5DF0-8A39-7248-5F94CF9E2485}"/>
+                <a16:creationId xmlns:a16="http://schemas.microsoft.com/office/drawing/2014/main" id="{EE3E1149-44FF-4DD8-6B06-5833CAD0B07C}"/>
               </a:ext>
             </a:extLst>
           </p:cNvPr>
@@ -894,7 +894,7 @@
           <p:cNvPr id="6" name="Slide Number Placeholder 5">
             <a:extLst>
               <a:ext uri="{FF2B5EF4-FFF2-40B4-BE49-F238E27FC236}">
-                <a16:creationId xmlns:a16="http://schemas.microsoft.com/office/drawing/2014/main" id="{83E76970-55C1-C33C-7C53-8809A78B68C9}"/>
+                <a16:creationId xmlns:a16="http://schemas.microsoft.com/office/drawing/2014/main" id="{1840EE39-C727-A361-415F-C20E8BBA8895}"/>
               </a:ext>
             </a:extLst>
           </p:cNvPr>
@@ -910,7 +910,7 @@
           <a:bodyPr/>
           <a:lstStyle/>
           <a:p>
-            <a:fld id="{23FD4D9C-AC70-4D05-AEBA-6D2EF8343C9E}" type="slidenum">
+            <a:fld id="{8286AFE5-9E18-4557-886E-3E84579CFD30}" type="slidenum">
               <a:rPr lang="en-US" smtClean="0"/>
               <a:t>‹#›</a:t>
             </a:fld>
@@ -921,7 +921,7 @@
     </p:spTree>
     <p:extLst>
       <p:ext uri="{BB962C8B-B14F-4D97-AF65-F5344CB8AC3E}">
-        <p14:creationId xmlns:p14="http://schemas.microsoft.com/office/powerpoint/2010/main" val="1417930415"/>
+        <p14:creationId xmlns:p14="http://schemas.microsoft.com/office/powerpoint/2010/main" val="1530871558"/>
       </p:ext>
     </p:extLst>
   </p:cSld>
@@ -953,7 +953,7 @@
           <p:cNvPr id="2" name="Title 1">
             <a:extLst>
               <a:ext uri="{FF2B5EF4-FFF2-40B4-BE49-F238E27FC236}">
-                <a16:creationId xmlns:a16="http://schemas.microsoft.com/office/drawing/2014/main" id="{7CE5249B-3CBA-34FE-2F07-89B31605B1FA}"/>
+                <a16:creationId xmlns:a16="http://schemas.microsoft.com/office/drawing/2014/main" id="{8FE4FDEE-04BF-86D7-5911-E0308399AA67}"/>
               </a:ext>
             </a:extLst>
           </p:cNvPr>
@@ -990,7 +990,7 @@
           <p:cNvPr id="3" name="Text Placeholder 2">
             <a:extLst>
               <a:ext uri="{FF2B5EF4-FFF2-40B4-BE49-F238E27FC236}">
-                <a16:creationId xmlns:a16="http://schemas.microsoft.com/office/drawing/2014/main" id="{22B1154F-9FE0-454A-532A-90E2DEB2391B}"/>
+                <a16:creationId xmlns:a16="http://schemas.microsoft.com/office/drawing/2014/main" id="{66A43716-F27F-6A27-E4BE-83FB57E27D5A}"/>
               </a:ext>
             </a:extLst>
           </p:cNvPr>
@@ -1115,7 +1115,7 @@
           <p:cNvPr id="4" name="Date Placeholder 3">
             <a:extLst>
               <a:ext uri="{FF2B5EF4-FFF2-40B4-BE49-F238E27FC236}">
-                <a16:creationId xmlns:a16="http://schemas.microsoft.com/office/drawing/2014/main" id="{EA80FBB4-D144-68DF-D294-E684A40959D8}"/>
+                <a16:creationId xmlns:a16="http://schemas.microsoft.com/office/drawing/2014/main" id="{1E5E49A5-5088-0DC4-208F-49ADAF36D5C2}"/>
               </a:ext>
             </a:extLst>
           </p:cNvPr>
@@ -1131,7 +1131,7 @@
           <a:bodyPr/>
           <a:lstStyle/>
           <a:p>
-            <a:fld id="{628E13F0-7675-4AE9-84E8-78CA07F33BCD}" type="datetimeFigureOut">
+            <a:fld id="{93955E2D-8DBF-4645-9168-FD7B691BF237}" type="datetimeFigureOut">
               <a:rPr lang="en-US" smtClean="0"/>
               <a:t>6/25/2026</a:t>
             </a:fld>
@@ -1144,7 +1144,7 @@
           <p:cNvPr id="5" name="Footer Placeholder 4">
             <a:extLst>
               <a:ext uri="{FF2B5EF4-FFF2-40B4-BE49-F238E27FC236}">
-                <a16:creationId xmlns:a16="http://schemas.microsoft.com/office/drawing/2014/main" id="{DCD2D018-B6AC-BE4D-7675-D770E694B417}"/>
+                <a16:creationId xmlns:a16="http://schemas.microsoft.com/office/drawing/2014/main" id="{F40583D3-0108-1384-A9DA-731BA91110B3}"/>
               </a:ext>
             </a:extLst>
           </p:cNvPr>
@@ -1169,7 +1169,7 @@
           <p:cNvPr id="6" name="Slide Number Placeholder 5">
             <a:extLst>
               <a:ext uri="{FF2B5EF4-FFF2-40B4-BE49-F238E27FC236}">
-                <a16:creationId xmlns:a16="http://schemas.microsoft.com/office/drawing/2014/main" id="{4B76281B-DBFA-EF14-6A7E-61F3403B654A}"/>
+                <a16:creationId xmlns:a16="http://schemas.microsoft.com/office/drawing/2014/main" id="{ACAACABE-5D1E-8B3D-8E68-7ACDCE89E04D}"/>
               </a:ext>
             </a:extLst>
           </p:cNvPr>
@@ -1185,7 +1185,7 @@
           <a:bodyPr/>
           <a:lstStyle/>
           <a:p>
-            <a:fld id="{23FD4D9C-AC70-4D05-AEBA-6D2EF8343C9E}" type="slidenum">
+            <a:fld id="{8286AFE5-9E18-4557-886E-3E84579CFD30}" type="slidenum">
               <a:rPr lang="en-US" smtClean="0"/>
               <a:t>‹#›</a:t>
             </a:fld>
@@ -1196,7 +1196,7 @@
     </p:spTree>
     <p:extLst>
       <p:ext uri="{BB962C8B-B14F-4D97-AF65-F5344CB8AC3E}">
-        <p14:creationId xmlns:p14="http://schemas.microsoft.com/office/powerpoint/2010/main" val="730797557"/>
+        <p14:creationId xmlns:p14="http://schemas.microsoft.com/office/powerpoint/2010/main" val="1566021364"/>
       </p:ext>
     </p:extLst>
   </p:cSld>
@@ -1228,7 +1228,7 @@
           <p:cNvPr id="2" name="Title 1">
             <a:extLst>
               <a:ext uri="{FF2B5EF4-FFF2-40B4-BE49-F238E27FC236}">
-                <a16:creationId xmlns:a16="http://schemas.microsoft.com/office/drawing/2014/main" id="{16525DA0-FD68-6770-2DDD-5E5BE4A66F1D}"/>
+                <a16:creationId xmlns:a16="http://schemas.microsoft.com/office/drawing/2014/main" id="{6FE9291E-5956-D250-78AF-BBB9AA048FE9}"/>
               </a:ext>
             </a:extLst>
           </p:cNvPr>
@@ -1256,7 +1256,7 @@
           <p:cNvPr id="3" name="Content Placeholder 2">
             <a:extLst>
               <a:ext uri="{FF2B5EF4-FFF2-40B4-BE49-F238E27FC236}">
-                <a16:creationId xmlns:a16="http://schemas.microsoft.com/office/drawing/2014/main" id="{79C54284-999F-F374-B171-96F4BC01CD2A}"/>
+                <a16:creationId xmlns:a16="http://schemas.microsoft.com/office/drawing/2014/main" id="{F426FC7C-E41D-2FA3-DE95-3B57859B9F75}"/>
               </a:ext>
             </a:extLst>
           </p:cNvPr>
@@ -1318,7 +1318,7 @@
           <p:cNvPr id="4" name="Content Placeholder 3">
             <a:extLst>
               <a:ext uri="{FF2B5EF4-FFF2-40B4-BE49-F238E27FC236}">
-                <a16:creationId xmlns:a16="http://schemas.microsoft.com/office/drawing/2014/main" id="{E1D5DB97-1669-699C-6E3E-C9DED5037E83}"/>
+                <a16:creationId xmlns:a16="http://schemas.microsoft.com/office/drawing/2014/main" id="{72177B5D-1D45-5503-2539-53AF4B6E38CB}"/>
               </a:ext>
             </a:extLst>
           </p:cNvPr>
@@ -1380,7 +1380,7 @@
           <p:cNvPr id="5" name="Date Placeholder 4">
             <a:extLst>
               <a:ext uri="{FF2B5EF4-FFF2-40B4-BE49-F238E27FC236}">
-                <a16:creationId xmlns:a16="http://schemas.microsoft.com/office/drawing/2014/main" id="{83402A22-9AA5-3910-6CA0-0EA0A8AF1819}"/>
+                <a16:creationId xmlns:a16="http://schemas.microsoft.com/office/drawing/2014/main" id="{645E3713-DFF2-35DA-6717-9489AB1A82C4}"/>
               </a:ext>
             </a:extLst>
           </p:cNvPr>
@@ -1396,7 +1396,7 @@
           <a:bodyPr/>
           <a:lstStyle/>
           <a:p>
-            <a:fld id="{628E13F0-7675-4AE9-84E8-78CA07F33BCD}" type="datetimeFigureOut">
+            <a:fld id="{93955E2D-8DBF-4645-9168-FD7B691BF237}" type="datetimeFigureOut">
               <a:rPr lang="en-US" smtClean="0"/>
               <a:t>6/25/2026</a:t>
             </a:fld>
@@ -1409,7 +1409,7 @@
           <p:cNvPr id="6" name="Footer Placeholder 5">
             <a:extLst>
               <a:ext uri="{FF2B5EF4-FFF2-40B4-BE49-F238E27FC236}">
-                <a16:creationId xmlns:a16="http://schemas.microsoft.com/office/drawing/2014/main" id="{A45DD6D6-53B1-F4C6-9714-67F14E53DD89}"/>
+                <a16:creationId xmlns:a16="http://schemas.microsoft.com/office/drawing/2014/main" id="{0414B5D4-628D-691C-0880-7F5FD9AC77E6}"/>
               </a:ext>
             </a:extLst>
           </p:cNvPr>
@@ -1434,7 +1434,7 @@
           <p:cNvPr id="7" name="Slide Number Placeholder 6">
             <a:extLst>
               <a:ext uri="{FF2B5EF4-FFF2-40B4-BE49-F238E27FC236}">
-                <a16:creationId xmlns:a16="http://schemas.microsoft.com/office/drawing/2014/main" id="{5D027853-10E8-4B30-4DBC-59445B02822A}"/>
+                <a16:creationId xmlns:a16="http://schemas.microsoft.com/office/drawing/2014/main" id="{EE8216C9-BC37-3396-8A23-7DD77E717952}"/>
               </a:ext>
             </a:extLst>
           </p:cNvPr>
@@ -1450,7 +1450,7 @@
           <a:bodyPr/>
           <a:lstStyle/>
           <a:p>
-            <a:fld id="{23FD4D9C-AC70-4D05-AEBA-6D2EF8343C9E}" type="slidenum">
+            <a:fld id="{8286AFE5-9E18-4557-886E-3E84579CFD30}" type="slidenum">
               <a:rPr lang="en-US" smtClean="0"/>
               <a:t>‹#›</a:t>
             </a:fld>
@@ -1461,7 +1461,7 @@
     </p:spTree>
     <p:extLst>
       <p:ext uri="{BB962C8B-B14F-4D97-AF65-F5344CB8AC3E}">
-        <p14:creationId xmlns:p14="http://schemas.microsoft.com/office/powerpoint/2010/main" val="4112586178"/>
+        <p14:creationId xmlns:p14="http://schemas.microsoft.com/office/powerpoint/2010/main" val="4249911511"/>
       </p:ext>
     </p:extLst>
   </p:cSld>
@@ -1493,7 +1493,7 @@
           <p:cNvPr id="2" name="Title 1">
             <a:extLst>
               <a:ext uri="{FF2B5EF4-FFF2-40B4-BE49-F238E27FC236}">
-                <a16:creationId xmlns:a16="http://schemas.microsoft.com/office/drawing/2014/main" id="{E5DB31DF-FB41-3E10-F428-5F6B388D6B8B}"/>
+                <a16:creationId xmlns:a16="http://schemas.microsoft.com/office/drawing/2014/main" id="{0A8ED00B-2FE4-30AA-05DA-68F4E1B551DF}"/>
               </a:ext>
             </a:extLst>
           </p:cNvPr>
@@ -1526,7 +1526,7 @@
           <p:cNvPr id="3" name="Text Placeholder 2">
             <a:extLst>
               <a:ext uri="{FF2B5EF4-FFF2-40B4-BE49-F238E27FC236}">
-                <a16:creationId xmlns:a16="http://schemas.microsoft.com/office/drawing/2014/main" id="{282199A3-932C-DDCF-6376-FD1FC7362C1A}"/>
+                <a16:creationId xmlns:a16="http://schemas.microsoft.com/office/drawing/2014/main" id="{A2089993-D9BC-D46C-1BD7-7A857BF04D53}"/>
               </a:ext>
             </a:extLst>
           </p:cNvPr>
@@ -1597,7 +1597,7 @@
           <p:cNvPr id="4" name="Content Placeholder 3">
             <a:extLst>
               <a:ext uri="{FF2B5EF4-FFF2-40B4-BE49-F238E27FC236}">
-                <a16:creationId xmlns:a16="http://schemas.microsoft.com/office/drawing/2014/main" id="{108AF3D2-1B03-2AE4-ED22-069509C37CAB}"/>
+                <a16:creationId xmlns:a16="http://schemas.microsoft.com/office/drawing/2014/main" id="{1585C726-AAB9-61EC-3C42-7AFA0D92721D}"/>
               </a:ext>
             </a:extLst>
           </p:cNvPr>
@@ -1659,7 +1659,7 @@
           <p:cNvPr id="5" name="Text Placeholder 4">
             <a:extLst>
               <a:ext uri="{FF2B5EF4-FFF2-40B4-BE49-F238E27FC236}">
-                <a16:creationId xmlns:a16="http://schemas.microsoft.com/office/drawing/2014/main" id="{0CA431E2-85E3-C703-627E-653160CAE878}"/>
+                <a16:creationId xmlns:a16="http://schemas.microsoft.com/office/drawing/2014/main" id="{7690D41B-5364-40A7-B75E-98ADF0DAB4AF}"/>
               </a:ext>
             </a:extLst>
           </p:cNvPr>
@@ -1730,7 +1730,7 @@
           <p:cNvPr id="6" name="Content Placeholder 5">
             <a:extLst>
               <a:ext uri="{FF2B5EF4-FFF2-40B4-BE49-F238E27FC236}">
-                <a16:creationId xmlns:a16="http://schemas.microsoft.com/office/drawing/2014/main" id="{7AE6E6B4-F231-CE65-D01C-7E7DAB389327}"/>
+                <a16:creationId xmlns:a16="http://schemas.microsoft.com/office/drawing/2014/main" id="{B8EFD487-B2FD-F343-F9B7-6701C79FDC6F}"/>
               </a:ext>
             </a:extLst>
           </p:cNvPr>
@@ -1792,7 +1792,7 @@
           <p:cNvPr id="7" name="Date Placeholder 6">
             <a:extLst>
               <a:ext uri="{FF2B5EF4-FFF2-40B4-BE49-F238E27FC236}">
-                <a16:creationId xmlns:a16="http://schemas.microsoft.com/office/drawing/2014/main" id="{027F6D38-C276-E9F1-DC8B-AC4176D60112}"/>
+                <a16:creationId xmlns:a16="http://schemas.microsoft.com/office/drawing/2014/main" id="{DB7AEFF4-9E3E-4829-5F7E-7E4F71ACB490}"/>
               </a:ext>
             </a:extLst>
           </p:cNvPr>
@@ -1808,7 +1808,7 @@
           <a:bodyPr/>
           <a:lstStyle/>
           <a:p>
-            <a:fld id="{628E13F0-7675-4AE9-84E8-78CA07F33BCD}" type="datetimeFigureOut">
+            <a:fld id="{93955E2D-8DBF-4645-9168-FD7B691BF237}" type="datetimeFigureOut">
               <a:rPr lang="en-US" smtClean="0"/>
               <a:t>6/25/2026</a:t>
             </a:fld>
@@ -1821,7 +1821,7 @@
           <p:cNvPr id="8" name="Footer Placeholder 7">
             <a:extLst>
               <a:ext uri="{FF2B5EF4-FFF2-40B4-BE49-F238E27FC236}">
-                <a16:creationId xmlns:a16="http://schemas.microsoft.com/office/drawing/2014/main" id="{A3023DEC-C7A5-673D-F83B-D2A1C3DDB56C}"/>
+                <a16:creationId xmlns:a16="http://schemas.microsoft.com/office/drawing/2014/main" id="{3B3D3FB9-A3F4-5B57-6699-337E5BEA30D6}"/>
               </a:ext>
             </a:extLst>
           </p:cNvPr>
@@ -1846,7 +1846,7 @@
           <p:cNvPr id="9" name="Slide Number Placeholder 8">
             <a:extLst>
               <a:ext uri="{FF2B5EF4-FFF2-40B4-BE49-F238E27FC236}">
-                <a16:creationId xmlns:a16="http://schemas.microsoft.com/office/drawing/2014/main" id="{24BFBCAE-27DB-A029-7F84-6D93FEB65A67}"/>
+                <a16:creationId xmlns:a16="http://schemas.microsoft.com/office/drawing/2014/main" id="{4C876699-E611-732E-0149-4F0C26F3A2AD}"/>
               </a:ext>
             </a:extLst>
           </p:cNvPr>
@@ -1862,7 +1862,7 @@
           <a:bodyPr/>
           <a:lstStyle/>
           <a:p>
-            <a:fld id="{23FD4D9C-AC70-4D05-AEBA-6D2EF8343C9E}" type="slidenum">
+            <a:fld id="{8286AFE5-9E18-4557-886E-3E84579CFD30}" type="slidenum">
               <a:rPr lang="en-US" smtClean="0"/>
               <a:t>‹#›</a:t>
             </a:fld>
@@ -1873,7 +1873,7 @@
     </p:spTree>
     <p:extLst>
       <p:ext uri="{BB962C8B-B14F-4D97-AF65-F5344CB8AC3E}">
-        <p14:creationId xmlns:p14="http://schemas.microsoft.com/office/powerpoint/2010/main" val="372067840"/>
+        <p14:creationId xmlns:p14="http://schemas.microsoft.com/office/powerpoint/2010/main" val="190386687"/>
       </p:ext>
     </p:extLst>
   </p:cSld>
@@ -1905,7 +1905,7 @@
           <p:cNvPr id="2" name="Title 1">
             <a:extLst>
               <a:ext uri="{FF2B5EF4-FFF2-40B4-BE49-F238E27FC236}">
-                <a16:creationId xmlns:a16="http://schemas.microsoft.com/office/drawing/2014/main" id="{12EE7D99-50B8-B764-6DA6-2611C3341ADD}"/>
+                <a16:creationId xmlns:a16="http://schemas.microsoft.com/office/drawing/2014/main" id="{E911AD9E-3CD0-FBF2-B519-8E99DEB22F2B}"/>
               </a:ext>
             </a:extLst>
           </p:cNvPr>
@@ -1933,7 +1933,7 @@
           <p:cNvPr id="3" name="Date Placeholder 2">
             <a:extLst>
               <a:ext uri="{FF2B5EF4-FFF2-40B4-BE49-F238E27FC236}">
-                <a16:creationId xmlns:a16="http://schemas.microsoft.com/office/drawing/2014/main" id="{B329B825-C427-C2DF-6512-CFF154586111}"/>
+                <a16:creationId xmlns:a16="http://schemas.microsoft.com/office/drawing/2014/main" id="{C426FF5F-DD2A-D86F-B419-BFEB3266DF44}"/>
               </a:ext>
             </a:extLst>
           </p:cNvPr>
@@ -1949,7 +1949,7 @@
           <a:bodyPr/>
           <a:lstStyle/>
           <a:p>
-            <a:fld id="{628E13F0-7675-4AE9-84E8-78CA07F33BCD}" type="datetimeFigureOut">
+            <a:fld id="{93955E2D-8DBF-4645-9168-FD7B691BF237}" type="datetimeFigureOut">
               <a:rPr lang="en-US" smtClean="0"/>
               <a:t>6/25/2026</a:t>
             </a:fld>
@@ -1962,7 +1962,7 @@
           <p:cNvPr id="4" name="Footer Placeholder 3">
             <a:extLst>
               <a:ext uri="{FF2B5EF4-FFF2-40B4-BE49-F238E27FC236}">
-                <a16:creationId xmlns:a16="http://schemas.microsoft.com/office/drawing/2014/main" id="{52F5DC0C-751B-7CA3-294D-AEE8CF52C75B}"/>
+                <a16:creationId xmlns:a16="http://schemas.microsoft.com/office/drawing/2014/main" id="{5E45262D-5D6F-59F5-87D8-08A2BA0C0EA6}"/>
               </a:ext>
             </a:extLst>
           </p:cNvPr>
@@ -1987,7 +1987,7 @@
           <p:cNvPr id="5" name="Slide Number Placeholder 4">
             <a:extLst>
               <a:ext uri="{FF2B5EF4-FFF2-40B4-BE49-F238E27FC236}">
-                <a16:creationId xmlns:a16="http://schemas.microsoft.com/office/drawing/2014/main" id="{2AE391FF-9409-DFB6-0D83-FC1484CE260B}"/>
+                <a16:creationId xmlns:a16="http://schemas.microsoft.com/office/drawing/2014/main" id="{F5CBE18F-106B-82EE-0CE9-5A103CE88BF4}"/>
               </a:ext>
             </a:extLst>
           </p:cNvPr>
@@ -2003,7 +2003,7 @@
           <a:bodyPr/>
           <a:lstStyle/>
           <a:p>
-            <a:fld id="{23FD4D9C-AC70-4D05-AEBA-6D2EF8343C9E}" type="slidenum">
+            <a:fld id="{8286AFE5-9E18-4557-886E-3E84579CFD30}" type="slidenum">
               <a:rPr lang="en-US" smtClean="0"/>
               <a:t>‹#›</a:t>
             </a:fld>
@@ -2014,7 +2014,7 @@
     </p:spTree>
     <p:extLst>
       <p:ext uri="{BB962C8B-B14F-4D97-AF65-F5344CB8AC3E}">
-        <p14:creationId xmlns:p14="http://schemas.microsoft.com/office/powerpoint/2010/main" val="1139790838"/>
+        <p14:creationId xmlns:p14="http://schemas.microsoft.com/office/powerpoint/2010/main" val="2383045173"/>
       </p:ext>
     </p:extLst>
   </p:cSld>
@@ -2046,7 +2046,7 @@
           <p:cNvPr id="2" name="Date Placeholder 1">
             <a:extLst>
               <a:ext uri="{FF2B5EF4-FFF2-40B4-BE49-F238E27FC236}">
-                <a16:creationId xmlns:a16="http://schemas.microsoft.com/office/drawing/2014/main" id="{C569E71A-22AE-5EC1-D417-544313654D6C}"/>
+                <a16:creationId xmlns:a16="http://schemas.microsoft.com/office/drawing/2014/main" id="{01605F21-FCEF-7CF3-6E64-019EDEE8349B}"/>
               </a:ext>
             </a:extLst>
           </p:cNvPr>
@@ -2062,7 +2062,7 @@
           <a:bodyPr/>
           <a:lstStyle/>
           <a:p>
-            <a:fld id="{628E13F0-7675-4AE9-84E8-78CA07F33BCD}" type="datetimeFigureOut">
+            <a:fld id="{93955E2D-8DBF-4645-9168-FD7B691BF237}" type="datetimeFigureOut">
               <a:rPr lang="en-US" smtClean="0"/>
               <a:t>6/25/2026</a:t>
             </a:fld>
@@ -2075,7 +2075,7 @@
           <p:cNvPr id="3" name="Footer Placeholder 2">
             <a:extLst>
               <a:ext uri="{FF2B5EF4-FFF2-40B4-BE49-F238E27FC236}">
-                <a16:creationId xmlns:a16="http://schemas.microsoft.com/office/drawing/2014/main" id="{88073379-CA90-086A-D37B-520552984A99}"/>
+                <a16:creationId xmlns:a16="http://schemas.microsoft.com/office/drawing/2014/main" id="{B30B2845-C65E-F42F-8189-DE1A92797AB7}"/>
               </a:ext>
             </a:extLst>
           </p:cNvPr>
@@ -2100,7 +2100,7 @@
           <p:cNvPr id="4" name="Slide Number Placeholder 3">
             <a:extLst>
               <a:ext uri="{FF2B5EF4-FFF2-40B4-BE49-F238E27FC236}">
-                <a16:creationId xmlns:a16="http://schemas.microsoft.com/office/drawing/2014/main" id="{969715B1-6B7D-2871-3328-A0A46EEB4A77}"/>
+                <a16:creationId xmlns:a16="http://schemas.microsoft.com/office/drawing/2014/main" id="{1A89EE4B-788F-E731-396A-FCF314C1D666}"/>
               </a:ext>
             </a:extLst>
           </p:cNvPr>
@@ -2116,7 +2116,7 @@
           <a:bodyPr/>
           <a:lstStyle/>
           <a:p>
-            <a:fld id="{23FD4D9C-AC70-4D05-AEBA-6D2EF8343C9E}" type="slidenum">
+            <a:fld id="{8286AFE5-9E18-4557-886E-3E84579CFD30}" type="slidenum">
               <a:rPr lang="en-US" smtClean="0"/>
               <a:t>‹#›</a:t>
             </a:fld>
@@ -2127,7 +2127,7 @@
     </p:spTree>
     <p:extLst>
       <p:ext uri="{BB962C8B-B14F-4D97-AF65-F5344CB8AC3E}">
-        <p14:creationId xmlns:p14="http://schemas.microsoft.com/office/powerpoint/2010/main" val="857922263"/>
+        <p14:creationId xmlns:p14="http://schemas.microsoft.com/office/powerpoint/2010/main" val="2237324614"/>
       </p:ext>
     </p:extLst>
   </p:cSld>
@@ -2159,7 +2159,7 @@
           <p:cNvPr id="2" name="Title 1">
             <a:extLst>
               <a:ext uri="{FF2B5EF4-FFF2-40B4-BE49-F238E27FC236}">
-                <a16:creationId xmlns:a16="http://schemas.microsoft.com/office/drawing/2014/main" id="{BD587D10-3FA3-3A24-E442-EF7F5D8CD6EC}"/>
+                <a16:creationId xmlns:a16="http://schemas.microsoft.com/office/drawing/2014/main" id="{2630B648-EF33-C321-04C7-E77BFA73A390}"/>
               </a:ext>
             </a:extLst>
           </p:cNvPr>
@@ -2196,7 +2196,7 @@
           <p:cNvPr id="3" name="Content Placeholder 2">
             <a:extLst>
               <a:ext uri="{FF2B5EF4-FFF2-40B4-BE49-F238E27FC236}">
-                <a16:creationId xmlns:a16="http://schemas.microsoft.com/office/drawing/2014/main" id="{AEE97977-42D2-89DE-571E-3DFF4C0B0244}"/>
+                <a16:creationId xmlns:a16="http://schemas.microsoft.com/office/drawing/2014/main" id="{E95D01CA-42BD-EE1C-41FA-8E0F07370664}"/>
               </a:ext>
             </a:extLst>
           </p:cNvPr>
@@ -2286,7 +2286,7 @@
           <p:cNvPr id="4" name="Text Placeholder 3">
             <a:extLst>
               <a:ext uri="{FF2B5EF4-FFF2-40B4-BE49-F238E27FC236}">
-                <a16:creationId xmlns:a16="http://schemas.microsoft.com/office/drawing/2014/main" id="{9BA4DD04-94C5-98B7-7E58-0F9C15CB2387}"/>
+                <a16:creationId xmlns:a16="http://schemas.microsoft.com/office/drawing/2014/main" id="{C20BF4CC-6E70-7ED2-4D62-ED7976B6404D}"/>
               </a:ext>
             </a:extLst>
           </p:cNvPr>
@@ -2357,7 +2357,7 @@
           <p:cNvPr id="5" name="Date Placeholder 4">
             <a:extLst>
               <a:ext uri="{FF2B5EF4-FFF2-40B4-BE49-F238E27FC236}">
-                <a16:creationId xmlns:a16="http://schemas.microsoft.com/office/drawing/2014/main" id="{046E5A53-C512-A90F-D9E6-DDEA1815495C}"/>
+                <a16:creationId xmlns:a16="http://schemas.microsoft.com/office/drawing/2014/main" id="{1B6D6982-876C-D58A-1ACC-B8F0C1043545}"/>
               </a:ext>
             </a:extLst>
           </p:cNvPr>
@@ -2373,7 +2373,7 @@
           <a:bodyPr/>
           <a:lstStyle/>
           <a:p>
-            <a:fld id="{628E13F0-7675-4AE9-84E8-78CA07F33BCD}" type="datetimeFigureOut">
+            <a:fld id="{93955E2D-8DBF-4645-9168-FD7B691BF237}" type="datetimeFigureOut">
               <a:rPr lang="en-US" smtClean="0"/>
               <a:t>6/25/2026</a:t>
             </a:fld>
@@ -2386,7 +2386,7 @@
           <p:cNvPr id="6" name="Footer Placeholder 5">
             <a:extLst>
               <a:ext uri="{FF2B5EF4-FFF2-40B4-BE49-F238E27FC236}">
-                <a16:creationId xmlns:a16="http://schemas.microsoft.com/office/drawing/2014/main" id="{D7009D78-37BA-12D0-4954-B0A1D727D6A2}"/>
+                <a16:creationId xmlns:a16="http://schemas.microsoft.com/office/drawing/2014/main" id="{5DE6F957-550D-40C2-BC54-87BD8345044A}"/>
               </a:ext>
             </a:extLst>
           </p:cNvPr>
@@ -2411,7 +2411,7 @@
           <p:cNvPr id="7" name="Slide Number Placeholder 6">
             <a:extLst>
               <a:ext uri="{FF2B5EF4-FFF2-40B4-BE49-F238E27FC236}">
-                <a16:creationId xmlns:a16="http://schemas.microsoft.com/office/drawing/2014/main" id="{018B79A1-4030-A97E-5FE1-695CB307667C}"/>
+                <a16:creationId xmlns:a16="http://schemas.microsoft.com/office/drawing/2014/main" id="{AC68AD89-B66E-27AC-2F59-18916CEBFAA5}"/>
               </a:ext>
             </a:extLst>
           </p:cNvPr>
@@ -2427,7 +2427,7 @@
           <a:bodyPr/>
           <a:lstStyle/>
           <a:p>
-            <a:fld id="{23FD4D9C-AC70-4D05-AEBA-6D2EF8343C9E}" type="slidenum">
+            <a:fld id="{8286AFE5-9E18-4557-886E-3E84579CFD30}" type="slidenum">
               <a:rPr lang="en-US" smtClean="0"/>
               <a:t>‹#›</a:t>
             </a:fld>
@@ -2438,7 +2438,7 @@
     </p:spTree>
     <p:extLst>
       <p:ext uri="{BB962C8B-B14F-4D97-AF65-F5344CB8AC3E}">
-        <p14:creationId xmlns:p14="http://schemas.microsoft.com/office/powerpoint/2010/main" val="631284054"/>
+        <p14:creationId xmlns:p14="http://schemas.microsoft.com/office/powerpoint/2010/main" val="4196887815"/>
       </p:ext>
     </p:extLst>
   </p:cSld>
@@ -2470,7 +2470,7 @@
           <p:cNvPr id="2" name="Title 1">
             <a:extLst>
               <a:ext uri="{FF2B5EF4-FFF2-40B4-BE49-F238E27FC236}">
-                <a16:creationId xmlns:a16="http://schemas.microsoft.com/office/drawing/2014/main" id="{FBF9B08B-985D-405D-F6A4-6A1D7A0E5DF8}"/>
+                <a16:creationId xmlns:a16="http://schemas.microsoft.com/office/drawing/2014/main" id="{0130033D-9C35-BAFA-7B6F-4B53D5D9609E}"/>
               </a:ext>
             </a:extLst>
           </p:cNvPr>
@@ -2507,7 +2507,7 @@
           <p:cNvPr id="3" name="Picture Placeholder 2">
             <a:extLst>
               <a:ext uri="{FF2B5EF4-FFF2-40B4-BE49-F238E27FC236}">
-                <a16:creationId xmlns:a16="http://schemas.microsoft.com/office/drawing/2014/main" id="{6AB995F3-9FD9-D34D-7398-D627B09B830A}"/>
+                <a16:creationId xmlns:a16="http://schemas.microsoft.com/office/drawing/2014/main" id="{1A9102B6-5707-64F0-B7C0-9A38E14F6522}"/>
               </a:ext>
             </a:extLst>
           </p:cNvPr>
@@ -2574,7 +2574,7 @@
           <p:cNvPr id="4" name="Text Placeholder 3">
             <a:extLst>
               <a:ext uri="{FF2B5EF4-FFF2-40B4-BE49-F238E27FC236}">
-                <a16:creationId xmlns:a16="http://schemas.microsoft.com/office/drawing/2014/main" id="{53EF49E0-BBE2-10A4-1DB9-BE8212DEA289}"/>
+                <a16:creationId xmlns:a16="http://schemas.microsoft.com/office/drawing/2014/main" id="{CB9F7292-1B77-38B7-9C1B-30903EA04AE7}"/>
               </a:ext>
             </a:extLst>
           </p:cNvPr>
@@ -2645,7 +2645,7 @@
           <p:cNvPr id="5" name="Date Placeholder 4">
             <a:extLst>
               <a:ext uri="{FF2B5EF4-FFF2-40B4-BE49-F238E27FC236}">
-                <a16:creationId xmlns:a16="http://schemas.microsoft.com/office/drawing/2014/main" id="{C9B3A9AB-001C-6679-63A3-20E58F86AA1D}"/>
+                <a16:creationId xmlns:a16="http://schemas.microsoft.com/office/drawing/2014/main" id="{A974C900-93B6-7446-EA65-073D7ED6560F}"/>
               </a:ext>
             </a:extLst>
           </p:cNvPr>
@@ -2661,7 +2661,7 @@
           <a:bodyPr/>
           <a:lstStyle/>
           <a:p>
-            <a:fld id="{628E13F0-7675-4AE9-84E8-78CA07F33BCD}" type="datetimeFigureOut">
+            <a:fld id="{93955E2D-8DBF-4645-9168-FD7B691BF237}" type="datetimeFigureOut">
               <a:rPr lang="en-US" smtClean="0"/>
               <a:t>6/25/2026</a:t>
             </a:fld>
@@ -2674,7 +2674,7 @@
           <p:cNvPr id="6" name="Footer Placeholder 5">
             <a:extLst>
               <a:ext uri="{FF2B5EF4-FFF2-40B4-BE49-F238E27FC236}">
-                <a16:creationId xmlns:a16="http://schemas.microsoft.com/office/drawing/2014/main" id="{28469323-892F-0AE4-A294-827DE510E917}"/>
+                <a16:creationId xmlns:a16="http://schemas.microsoft.com/office/drawing/2014/main" id="{A21597A5-1510-9C6F-1759-ECC553C6589D}"/>
               </a:ext>
             </a:extLst>
           </p:cNvPr>
@@ -2699,7 +2699,7 @@
           <p:cNvPr id="7" name="Slide Number Placeholder 6">
             <a:extLst>
               <a:ext uri="{FF2B5EF4-FFF2-40B4-BE49-F238E27FC236}">
-                <a16:creationId xmlns:a16="http://schemas.microsoft.com/office/drawing/2014/main" id="{CD434B68-30B6-4E72-1B17-9A7076E0FD3E}"/>
+                <a16:creationId xmlns:a16="http://schemas.microsoft.com/office/drawing/2014/main" id="{1CE278FC-D73E-1CAB-35AA-0E24E3B5DF16}"/>
               </a:ext>
             </a:extLst>
           </p:cNvPr>
@@ -2715,7 +2715,7 @@
           <a:bodyPr/>
           <a:lstStyle/>
           <a:p>
-            <a:fld id="{23FD4D9C-AC70-4D05-AEBA-6D2EF8343C9E}" type="slidenum">
+            <a:fld id="{8286AFE5-9E18-4557-886E-3E84579CFD30}" type="slidenum">
               <a:rPr lang="en-US" smtClean="0"/>
               <a:t>‹#›</a:t>
             </a:fld>
@@ -2726,7 +2726,7 @@
     </p:spTree>
     <p:extLst>
       <p:ext uri="{BB962C8B-B14F-4D97-AF65-F5344CB8AC3E}">
-        <p14:creationId xmlns:p14="http://schemas.microsoft.com/office/powerpoint/2010/main" val="1591649241"/>
+        <p14:creationId xmlns:p14="http://schemas.microsoft.com/office/powerpoint/2010/main" val="3418078532"/>
       </p:ext>
     </p:extLst>
   </p:cSld>
@@ -2763,7 +2763,7 @@
           <p:cNvPr id="2" name="Title Placeholder 1">
             <a:extLst>
               <a:ext uri="{FF2B5EF4-FFF2-40B4-BE49-F238E27FC236}">
-                <a16:creationId xmlns:a16="http://schemas.microsoft.com/office/drawing/2014/main" id="{F31067FB-5F12-176F-3A8F-0700993A0D11}"/>
+                <a16:creationId xmlns:a16="http://schemas.microsoft.com/office/drawing/2014/main" id="{2C2F98B1-D7F3-A170-01A7-DE4CDE74E1F4}"/>
               </a:ext>
             </a:extLst>
           </p:cNvPr>
@@ -2801,7 +2801,7 @@
           <p:cNvPr id="3" name="Text Placeholder 2">
             <a:extLst>
               <a:ext uri="{FF2B5EF4-FFF2-40B4-BE49-F238E27FC236}">
-                <a16:creationId xmlns:a16="http://schemas.microsoft.com/office/drawing/2014/main" id="{F6D74872-52AE-706F-C4B6-32195DE7922D}"/>
+                <a16:creationId xmlns:a16="http://schemas.microsoft.com/office/drawing/2014/main" id="{73A5C6BF-58D4-95D2-EC17-236533BA86EC}"/>
               </a:ext>
             </a:extLst>
           </p:cNvPr>
@@ -2868,7 +2868,7 @@
           <p:cNvPr id="4" name="Date Placeholder 3">
             <a:extLst>
               <a:ext uri="{FF2B5EF4-FFF2-40B4-BE49-F238E27FC236}">
-                <a16:creationId xmlns:a16="http://schemas.microsoft.com/office/drawing/2014/main" id="{DE0E4EBD-ACAF-D16D-DFAB-088A8AA3636B}"/>
+                <a16:creationId xmlns:a16="http://schemas.microsoft.com/office/drawing/2014/main" id="{7368A97E-AD16-2CD4-890B-A4CA973FD307}"/>
               </a:ext>
             </a:extLst>
           </p:cNvPr>
@@ -2902,7 +2902,7 @@
             </a:lvl1pPr>
           </a:lstStyle>
           <a:p>
-            <a:fld id="{628E13F0-7675-4AE9-84E8-78CA07F33BCD}" type="datetimeFigureOut">
+            <a:fld id="{93955E2D-8DBF-4645-9168-FD7B691BF237}" type="datetimeFigureOut">
               <a:rPr lang="en-US" smtClean="0"/>
               <a:t>6/25/2026</a:t>
             </a:fld>
@@ -2915,7 +2915,7 @@
           <p:cNvPr id="5" name="Footer Placeholder 4">
             <a:extLst>
               <a:ext uri="{FF2B5EF4-FFF2-40B4-BE49-F238E27FC236}">
-                <a16:creationId xmlns:a16="http://schemas.microsoft.com/office/drawing/2014/main" id="{42AAC14B-ED03-3827-E149-CF7F780AB0CC}"/>
+                <a16:creationId xmlns:a16="http://schemas.microsoft.com/office/drawing/2014/main" id="{4BCA53FD-6A55-ABE3-82AF-886B354461BD}"/>
               </a:ext>
             </a:extLst>
           </p:cNvPr>
@@ -2958,7 +2958,7 @@
           <p:cNvPr id="6" name="Slide Number Placeholder 5">
             <a:extLst>
               <a:ext uri="{FF2B5EF4-FFF2-40B4-BE49-F238E27FC236}">
-                <a16:creationId xmlns:a16="http://schemas.microsoft.com/office/drawing/2014/main" id="{799E64AD-276E-CC30-D818-33DBCF3D6F50}"/>
+                <a16:creationId xmlns:a16="http://schemas.microsoft.com/office/drawing/2014/main" id="{91BC8872-56F0-041F-E2EE-3283F8BF7AC9}"/>
               </a:ext>
             </a:extLst>
           </p:cNvPr>
@@ -2992,7 +2992,7 @@
             </a:lvl1pPr>
           </a:lstStyle>
           <a:p>
-            <a:fld id="{23FD4D9C-AC70-4D05-AEBA-6D2EF8343C9E}" type="slidenum">
+            <a:fld id="{8286AFE5-9E18-4557-886E-3E84579CFD30}" type="slidenum">
               <a:rPr lang="en-US" smtClean="0"/>
               <a:t>‹#›</a:t>
             </a:fld>
@@ -3003,7 +3003,7 @@
     </p:spTree>
     <p:extLst>
       <p:ext uri="{BB962C8B-B14F-4D97-AF65-F5344CB8AC3E}">
-        <p14:creationId xmlns:p14="http://schemas.microsoft.com/office/powerpoint/2010/main" val="3366355"/>
+        <p14:creationId xmlns:p14="http://schemas.microsoft.com/office/powerpoint/2010/main" val="884963187"/>
       </p:ext>
     </p:extLst>
   </p:cSld>
@@ -3326,7 +3326,7 @@
           <p:cNvPr id="3" name="TestPicture">
             <a:extLst>
               <a:ext uri="{FF2B5EF4-FFF2-40B4-BE49-F238E27FC236}">
-                <a16:creationId xmlns:a16="http://schemas.microsoft.com/office/drawing/2014/main" id="{38B53B06-1A3C-9AC7-7AA6-DB2D7645F2EA}"/>
+                <a16:creationId xmlns:a16="http://schemas.microsoft.com/office/drawing/2014/main" id="{8C8849D0-85EE-7C6E-2FE0-06B63E7F6905}"/>
               </a:ext>
             </a:extLst>
           </p:cNvPr>
@@ -3362,7 +3362,7 @@
           <p:cNvPr id="4" name="TextBox 3">
             <a:extLst>
               <a:ext uri="{FF2B5EF4-FFF2-40B4-BE49-F238E27FC236}">
-                <a16:creationId xmlns:a16="http://schemas.microsoft.com/office/drawing/2014/main" id="{C3669F31-7681-34CA-8585-ADD37FDCF246}"/>
+                <a16:creationId xmlns:a16="http://schemas.microsoft.com/office/drawing/2014/main" id="{CD91DBE8-3DAE-7B2E-B1E7-2B06C8329FD9}"/>
               </a:ext>
             </a:extLst>
           </p:cNvPr>
@@ -3395,7 +3395,7 @@
     </p:spTree>
     <p:extLst>
       <p:ext uri="{BB962C8B-B14F-4D97-AF65-F5344CB8AC3E}">
-        <p14:creationId xmlns:p14="http://schemas.microsoft.com/office/powerpoint/2010/main" val="1364332525"/>
+        <p14:creationId xmlns:p14="http://schemas.microsoft.com/office/powerpoint/2010/main" val="2807212664"/>
       </p:ext>
     </p:extLst>
   </p:cSld>

--- a/tools/FreeP.RenderCompare/corpus/04-picture.pptx
+++ b/tools/FreeP.RenderCompare/corpus/04-picture.pptx
@@ -129,7 +129,7 @@
           <p:cNvPr id="2" name="Title 1">
             <a:extLst>
               <a:ext uri="{FF2B5EF4-FFF2-40B4-BE49-F238E27FC236}">
-                <a16:creationId xmlns:a16="http://schemas.microsoft.com/office/drawing/2014/main" id="{B6A0306D-FF1A-D356-00B1-28949A8764BC}"/>
+                <a16:creationId xmlns:a16="http://schemas.microsoft.com/office/drawing/2014/main" id="{15E09068-0C80-9F65-93BD-F3B18FEA1BB6}"/>
               </a:ext>
             </a:extLst>
           </p:cNvPr>
@@ -166,7 +166,7 @@
           <p:cNvPr id="3" name="Subtitle 2">
             <a:extLst>
               <a:ext uri="{FF2B5EF4-FFF2-40B4-BE49-F238E27FC236}">
-                <a16:creationId xmlns:a16="http://schemas.microsoft.com/office/drawing/2014/main" id="{DD3680C7-1BCB-33D6-CB3F-5C003DACCC9A}"/>
+                <a16:creationId xmlns:a16="http://schemas.microsoft.com/office/drawing/2014/main" id="{0C53C1C7-7FF0-97EB-858F-36ED6CDC6F0D}"/>
               </a:ext>
             </a:extLst>
           </p:cNvPr>
@@ -236,7 +236,7 @@
           <p:cNvPr id="4" name="Date Placeholder 3">
             <a:extLst>
               <a:ext uri="{FF2B5EF4-FFF2-40B4-BE49-F238E27FC236}">
-                <a16:creationId xmlns:a16="http://schemas.microsoft.com/office/drawing/2014/main" id="{658CDC1F-CDCE-B652-EA8B-5B3A958AC62C}"/>
+                <a16:creationId xmlns:a16="http://schemas.microsoft.com/office/drawing/2014/main" id="{487E6DB1-3C01-F879-57A6-1E62C41B96BC}"/>
               </a:ext>
             </a:extLst>
           </p:cNvPr>
@@ -252,7 +252,7 @@
           <a:bodyPr/>
           <a:lstStyle/>
           <a:p>
-            <a:fld id="{93955E2D-8DBF-4645-9168-FD7B691BF237}" type="datetimeFigureOut">
+            <a:fld id="{9EA719E9-E1C7-4088-B20A-F699BC12EC34}" type="datetimeFigureOut">
               <a:rPr lang="en-US" smtClean="0"/>
               <a:t>6/25/2026</a:t>
             </a:fld>
@@ -265,7 +265,7 @@
           <p:cNvPr id="5" name="Footer Placeholder 4">
             <a:extLst>
               <a:ext uri="{FF2B5EF4-FFF2-40B4-BE49-F238E27FC236}">
-                <a16:creationId xmlns:a16="http://schemas.microsoft.com/office/drawing/2014/main" id="{1E07F6E6-BD06-4C7E-4A1E-C5C505442FF2}"/>
+                <a16:creationId xmlns:a16="http://schemas.microsoft.com/office/drawing/2014/main" id="{C89FAC85-D419-55CE-B9DB-75EC30AA7A64}"/>
               </a:ext>
             </a:extLst>
           </p:cNvPr>
@@ -290,7 +290,7 @@
           <p:cNvPr id="6" name="Slide Number Placeholder 5">
             <a:extLst>
               <a:ext uri="{FF2B5EF4-FFF2-40B4-BE49-F238E27FC236}">
-                <a16:creationId xmlns:a16="http://schemas.microsoft.com/office/drawing/2014/main" id="{96D6DBF6-6EC7-5279-2171-0F4FC0D90729}"/>
+                <a16:creationId xmlns:a16="http://schemas.microsoft.com/office/drawing/2014/main" id="{A1925A42-820E-8C4A-17B9-5716DBAA2982}"/>
               </a:ext>
             </a:extLst>
           </p:cNvPr>
@@ -306,7 +306,7 @@
           <a:bodyPr/>
           <a:lstStyle/>
           <a:p>
-            <a:fld id="{8286AFE5-9E18-4557-886E-3E84579CFD30}" type="slidenum">
+            <a:fld id="{7189187B-99F4-4735-ABB4-FE66A9D55044}" type="slidenum">
               <a:rPr lang="en-US" smtClean="0"/>
               <a:t>‹#›</a:t>
             </a:fld>
@@ -317,7 +317,7 @@
     </p:spTree>
     <p:extLst>
       <p:ext uri="{BB962C8B-B14F-4D97-AF65-F5344CB8AC3E}">
-        <p14:creationId xmlns:p14="http://schemas.microsoft.com/office/powerpoint/2010/main" val="3767774199"/>
+        <p14:creationId xmlns:p14="http://schemas.microsoft.com/office/powerpoint/2010/main" val="2820323411"/>
       </p:ext>
     </p:extLst>
   </p:cSld>
@@ -349,7 +349,7 @@
           <p:cNvPr id="2" name="Title 1">
             <a:extLst>
               <a:ext uri="{FF2B5EF4-FFF2-40B4-BE49-F238E27FC236}">
-                <a16:creationId xmlns:a16="http://schemas.microsoft.com/office/drawing/2014/main" id="{599FCC46-4917-57AA-20DA-7604C8B47EB3}"/>
+                <a16:creationId xmlns:a16="http://schemas.microsoft.com/office/drawing/2014/main" id="{6A90EB0C-D25C-30A0-CD23-C5D69A231158}"/>
               </a:ext>
             </a:extLst>
           </p:cNvPr>
@@ -377,7 +377,7 @@
           <p:cNvPr id="3" name="Vertical Text Placeholder 2">
             <a:extLst>
               <a:ext uri="{FF2B5EF4-FFF2-40B4-BE49-F238E27FC236}">
-                <a16:creationId xmlns:a16="http://schemas.microsoft.com/office/drawing/2014/main" id="{5F1FD2C6-D183-FE0E-1D3B-9747E0830D82}"/>
+                <a16:creationId xmlns:a16="http://schemas.microsoft.com/office/drawing/2014/main" id="{71D4D8CC-4820-6C8B-FD26-D458D916C1F6}"/>
               </a:ext>
             </a:extLst>
           </p:cNvPr>
@@ -434,7 +434,7 @@
           <p:cNvPr id="4" name="Date Placeholder 3">
             <a:extLst>
               <a:ext uri="{FF2B5EF4-FFF2-40B4-BE49-F238E27FC236}">
-                <a16:creationId xmlns:a16="http://schemas.microsoft.com/office/drawing/2014/main" id="{978ED489-4BAE-0FD0-7216-C0201A245065}"/>
+                <a16:creationId xmlns:a16="http://schemas.microsoft.com/office/drawing/2014/main" id="{5DC592D0-6B23-0E28-6A3D-599601F2CDE9}"/>
               </a:ext>
             </a:extLst>
           </p:cNvPr>
@@ -450,7 +450,7 @@
           <a:bodyPr/>
           <a:lstStyle/>
           <a:p>
-            <a:fld id="{93955E2D-8DBF-4645-9168-FD7B691BF237}" type="datetimeFigureOut">
+            <a:fld id="{9EA719E9-E1C7-4088-B20A-F699BC12EC34}" type="datetimeFigureOut">
               <a:rPr lang="en-US" smtClean="0"/>
               <a:t>6/25/2026</a:t>
             </a:fld>
@@ -463,7 +463,7 @@
           <p:cNvPr id="5" name="Footer Placeholder 4">
             <a:extLst>
               <a:ext uri="{FF2B5EF4-FFF2-40B4-BE49-F238E27FC236}">
-                <a16:creationId xmlns:a16="http://schemas.microsoft.com/office/drawing/2014/main" id="{BC33408B-F30B-3DC5-9E63-7F602E6F71EA}"/>
+                <a16:creationId xmlns:a16="http://schemas.microsoft.com/office/drawing/2014/main" id="{80AA1507-140B-AD60-5BAA-9ECCB8A2CF53}"/>
               </a:ext>
             </a:extLst>
           </p:cNvPr>
@@ -488,7 +488,7 @@
           <p:cNvPr id="6" name="Slide Number Placeholder 5">
             <a:extLst>
               <a:ext uri="{FF2B5EF4-FFF2-40B4-BE49-F238E27FC236}">
-                <a16:creationId xmlns:a16="http://schemas.microsoft.com/office/drawing/2014/main" id="{E6B7AE24-3615-E26B-8379-084F6704CAC6}"/>
+                <a16:creationId xmlns:a16="http://schemas.microsoft.com/office/drawing/2014/main" id="{AE10D673-29B1-D439-C94F-36F48E7B9C02}"/>
               </a:ext>
             </a:extLst>
           </p:cNvPr>
@@ -504,7 +504,7 @@
           <a:bodyPr/>
           <a:lstStyle/>
           <a:p>
-            <a:fld id="{8286AFE5-9E18-4557-886E-3E84579CFD30}" type="slidenum">
+            <a:fld id="{7189187B-99F4-4735-ABB4-FE66A9D55044}" type="slidenum">
               <a:rPr lang="en-US" smtClean="0"/>
               <a:t>‹#›</a:t>
             </a:fld>
@@ -515,7 +515,7 @@
     </p:spTree>
     <p:extLst>
       <p:ext uri="{BB962C8B-B14F-4D97-AF65-F5344CB8AC3E}">
-        <p14:creationId xmlns:p14="http://schemas.microsoft.com/office/powerpoint/2010/main" val="2659428246"/>
+        <p14:creationId xmlns:p14="http://schemas.microsoft.com/office/powerpoint/2010/main" val="2811021271"/>
       </p:ext>
     </p:extLst>
   </p:cSld>
@@ -547,7 +547,7 @@
           <p:cNvPr id="2" name="Vertical Title 1">
             <a:extLst>
               <a:ext uri="{FF2B5EF4-FFF2-40B4-BE49-F238E27FC236}">
-                <a16:creationId xmlns:a16="http://schemas.microsoft.com/office/drawing/2014/main" id="{DE412454-7B9F-85B1-2B36-09D046892A6A}"/>
+                <a16:creationId xmlns:a16="http://schemas.microsoft.com/office/drawing/2014/main" id="{E3F2A4AE-504A-46F9-2514-3D980292A127}"/>
               </a:ext>
             </a:extLst>
           </p:cNvPr>
@@ -580,7 +580,7 @@
           <p:cNvPr id="3" name="Vertical Text Placeholder 2">
             <a:extLst>
               <a:ext uri="{FF2B5EF4-FFF2-40B4-BE49-F238E27FC236}">
-                <a16:creationId xmlns:a16="http://schemas.microsoft.com/office/drawing/2014/main" id="{BD6D4C78-BF9C-A258-1A8C-D734FE0000DE}"/>
+                <a16:creationId xmlns:a16="http://schemas.microsoft.com/office/drawing/2014/main" id="{AC5E2D63-8108-AED1-8C58-EFE336B89295}"/>
               </a:ext>
             </a:extLst>
           </p:cNvPr>
@@ -642,7 +642,7 @@
           <p:cNvPr id="4" name="Date Placeholder 3">
             <a:extLst>
               <a:ext uri="{FF2B5EF4-FFF2-40B4-BE49-F238E27FC236}">
-                <a16:creationId xmlns:a16="http://schemas.microsoft.com/office/drawing/2014/main" id="{FC061A71-6EDB-E48A-1638-11A4A60D0D64}"/>
+                <a16:creationId xmlns:a16="http://schemas.microsoft.com/office/drawing/2014/main" id="{73A2F0E7-DB96-84E0-E63F-4A2ABF00B8DD}"/>
               </a:ext>
             </a:extLst>
           </p:cNvPr>
@@ -658,7 +658,7 @@
           <a:bodyPr/>
           <a:lstStyle/>
           <a:p>
-            <a:fld id="{93955E2D-8DBF-4645-9168-FD7B691BF237}" type="datetimeFigureOut">
+            <a:fld id="{9EA719E9-E1C7-4088-B20A-F699BC12EC34}" type="datetimeFigureOut">
               <a:rPr lang="en-US" smtClean="0"/>
               <a:t>6/25/2026</a:t>
             </a:fld>
@@ -671,7 +671,7 @@
           <p:cNvPr id="5" name="Footer Placeholder 4">
             <a:extLst>
               <a:ext uri="{FF2B5EF4-FFF2-40B4-BE49-F238E27FC236}">
-                <a16:creationId xmlns:a16="http://schemas.microsoft.com/office/drawing/2014/main" id="{D6E43A65-CCF1-CD4C-0393-EFC4EC1F9CF8}"/>
+                <a16:creationId xmlns:a16="http://schemas.microsoft.com/office/drawing/2014/main" id="{23BBE223-A527-0A3F-1A6F-302015C396E8}"/>
               </a:ext>
             </a:extLst>
           </p:cNvPr>
@@ -696,7 +696,7 @@
           <p:cNvPr id="6" name="Slide Number Placeholder 5">
             <a:extLst>
               <a:ext uri="{FF2B5EF4-FFF2-40B4-BE49-F238E27FC236}">
-                <a16:creationId xmlns:a16="http://schemas.microsoft.com/office/drawing/2014/main" id="{4C4D2C80-E4BD-E879-0332-AE149E2B4EB3}"/>
+                <a16:creationId xmlns:a16="http://schemas.microsoft.com/office/drawing/2014/main" id="{0CA53153-040D-27ED-C2E4-E0CBF712C8D0}"/>
               </a:ext>
             </a:extLst>
           </p:cNvPr>
@@ -712,7 +712,7 @@
           <a:bodyPr/>
           <a:lstStyle/>
           <a:p>
-            <a:fld id="{8286AFE5-9E18-4557-886E-3E84579CFD30}" type="slidenum">
+            <a:fld id="{7189187B-99F4-4735-ABB4-FE66A9D55044}" type="slidenum">
               <a:rPr lang="en-US" smtClean="0"/>
               <a:t>‹#›</a:t>
             </a:fld>
@@ -723,7 +723,7 @@
     </p:spTree>
     <p:extLst>
       <p:ext uri="{BB962C8B-B14F-4D97-AF65-F5344CB8AC3E}">
-        <p14:creationId xmlns:p14="http://schemas.microsoft.com/office/powerpoint/2010/main" val="512883601"/>
+        <p14:creationId xmlns:p14="http://schemas.microsoft.com/office/powerpoint/2010/main" val="1292239271"/>
       </p:ext>
     </p:extLst>
   </p:cSld>
@@ -755,7 +755,7 @@
           <p:cNvPr id="2" name="Title 1">
             <a:extLst>
               <a:ext uri="{FF2B5EF4-FFF2-40B4-BE49-F238E27FC236}">
-                <a16:creationId xmlns:a16="http://schemas.microsoft.com/office/drawing/2014/main" id="{96AA6EA1-3E89-FA5F-C4DD-4766CEFDCD3B}"/>
+                <a16:creationId xmlns:a16="http://schemas.microsoft.com/office/drawing/2014/main" id="{48D7691A-6A71-D007-5E39-9687DBE5EBED}"/>
               </a:ext>
             </a:extLst>
           </p:cNvPr>
@@ -783,7 +783,7 @@
           <p:cNvPr id="3" name="Content Placeholder 2">
             <a:extLst>
               <a:ext uri="{FF2B5EF4-FFF2-40B4-BE49-F238E27FC236}">
-                <a16:creationId xmlns:a16="http://schemas.microsoft.com/office/drawing/2014/main" id="{42FB8648-564F-95B1-FC5E-5A159C4A8800}"/>
+                <a16:creationId xmlns:a16="http://schemas.microsoft.com/office/drawing/2014/main" id="{64E31534-A758-375C-07A9-B98E128F6678}"/>
               </a:ext>
             </a:extLst>
           </p:cNvPr>
@@ -840,7 +840,7 @@
           <p:cNvPr id="4" name="Date Placeholder 3">
             <a:extLst>
               <a:ext uri="{FF2B5EF4-FFF2-40B4-BE49-F238E27FC236}">
-                <a16:creationId xmlns:a16="http://schemas.microsoft.com/office/drawing/2014/main" id="{0BA8A725-67E2-F4B7-0224-E18FC6DEEEA0}"/>
+                <a16:creationId xmlns:a16="http://schemas.microsoft.com/office/drawing/2014/main" id="{D7F70F60-485E-0DE4-1448-ED0A1B2C37EE}"/>
               </a:ext>
             </a:extLst>
           </p:cNvPr>
@@ -856,7 +856,7 @@
           <a:bodyPr/>
           <a:lstStyle/>
           <a:p>
-            <a:fld id="{93955E2D-8DBF-4645-9168-FD7B691BF237}" type="datetimeFigureOut">
+            <a:fld id="{9EA719E9-E1C7-4088-B20A-F699BC12EC34}" type="datetimeFigureOut">
               <a:rPr lang="en-US" smtClean="0"/>
               <a:t>6/25/2026</a:t>
             </a:fld>
@@ -869,7 +869,7 @@
           <p:cNvPr id="5" name="Footer Placeholder 4">
             <a:extLst>
               <a:ext uri="{FF2B5EF4-FFF2-40B4-BE49-F238E27FC236}">
-                <a16:creationId xmlns:a16="http://schemas.microsoft.com/office/drawing/2014/main" id="{EE3E1149-44FF-4DD8-6B06-5833CAD0B07C}"/>
+                <a16:creationId xmlns:a16="http://schemas.microsoft.com/office/drawing/2014/main" id="{0612D660-1B61-93B9-0505-067E7B267A7E}"/>
               </a:ext>
             </a:extLst>
           </p:cNvPr>
@@ -894,7 +894,7 @@
           <p:cNvPr id="6" name="Slide Number Placeholder 5">
             <a:extLst>
               <a:ext uri="{FF2B5EF4-FFF2-40B4-BE49-F238E27FC236}">
-                <a16:creationId xmlns:a16="http://schemas.microsoft.com/office/drawing/2014/main" id="{1840EE39-C727-A361-415F-C20E8BBA8895}"/>
+                <a16:creationId xmlns:a16="http://schemas.microsoft.com/office/drawing/2014/main" id="{D37B2844-9EC8-CAD4-F733-DF39C1375854}"/>
               </a:ext>
             </a:extLst>
           </p:cNvPr>
@@ -910,7 +910,7 @@
           <a:bodyPr/>
           <a:lstStyle/>
           <a:p>
-            <a:fld id="{8286AFE5-9E18-4557-886E-3E84579CFD30}" type="slidenum">
+            <a:fld id="{7189187B-99F4-4735-ABB4-FE66A9D55044}" type="slidenum">
               <a:rPr lang="en-US" smtClean="0"/>
               <a:t>‹#›</a:t>
             </a:fld>
@@ -921,7 +921,7 @@
     </p:spTree>
     <p:extLst>
       <p:ext uri="{BB962C8B-B14F-4D97-AF65-F5344CB8AC3E}">
-        <p14:creationId xmlns:p14="http://schemas.microsoft.com/office/powerpoint/2010/main" val="1530871558"/>
+        <p14:creationId xmlns:p14="http://schemas.microsoft.com/office/powerpoint/2010/main" val="3462802666"/>
       </p:ext>
     </p:extLst>
   </p:cSld>
@@ -953,7 +953,7 @@
           <p:cNvPr id="2" name="Title 1">
             <a:extLst>
               <a:ext uri="{FF2B5EF4-FFF2-40B4-BE49-F238E27FC236}">
-                <a16:creationId xmlns:a16="http://schemas.microsoft.com/office/drawing/2014/main" id="{8FE4FDEE-04BF-86D7-5911-E0308399AA67}"/>
+                <a16:creationId xmlns:a16="http://schemas.microsoft.com/office/drawing/2014/main" id="{00B84791-7611-482F-F00B-5C82AF75C7B3}"/>
               </a:ext>
             </a:extLst>
           </p:cNvPr>
@@ -990,7 +990,7 @@
           <p:cNvPr id="3" name="Text Placeholder 2">
             <a:extLst>
               <a:ext uri="{FF2B5EF4-FFF2-40B4-BE49-F238E27FC236}">
-                <a16:creationId xmlns:a16="http://schemas.microsoft.com/office/drawing/2014/main" id="{66A43716-F27F-6A27-E4BE-83FB57E27D5A}"/>
+                <a16:creationId xmlns:a16="http://schemas.microsoft.com/office/drawing/2014/main" id="{E827FEF5-38C0-6EF3-3215-7E509826CF57}"/>
               </a:ext>
             </a:extLst>
           </p:cNvPr>
@@ -1115,7 +1115,7 @@
           <p:cNvPr id="4" name="Date Placeholder 3">
             <a:extLst>
               <a:ext uri="{FF2B5EF4-FFF2-40B4-BE49-F238E27FC236}">
-                <a16:creationId xmlns:a16="http://schemas.microsoft.com/office/drawing/2014/main" id="{1E5E49A5-5088-0DC4-208F-49ADAF36D5C2}"/>
+                <a16:creationId xmlns:a16="http://schemas.microsoft.com/office/drawing/2014/main" id="{A4D40594-8120-8152-39A0-BCA9B97E3AE1}"/>
               </a:ext>
             </a:extLst>
           </p:cNvPr>
@@ -1131,7 +1131,7 @@
           <a:bodyPr/>
           <a:lstStyle/>
           <a:p>
-            <a:fld id="{93955E2D-8DBF-4645-9168-FD7B691BF237}" type="datetimeFigureOut">
+            <a:fld id="{9EA719E9-E1C7-4088-B20A-F699BC12EC34}" type="datetimeFigureOut">
               <a:rPr lang="en-US" smtClean="0"/>
               <a:t>6/25/2026</a:t>
             </a:fld>
@@ -1144,7 +1144,7 @@
           <p:cNvPr id="5" name="Footer Placeholder 4">
             <a:extLst>
               <a:ext uri="{FF2B5EF4-FFF2-40B4-BE49-F238E27FC236}">
-                <a16:creationId xmlns:a16="http://schemas.microsoft.com/office/drawing/2014/main" id="{F40583D3-0108-1384-A9DA-731BA91110B3}"/>
+                <a16:creationId xmlns:a16="http://schemas.microsoft.com/office/drawing/2014/main" id="{BA974762-F750-CF48-A27C-D555FF335DB4}"/>
               </a:ext>
             </a:extLst>
           </p:cNvPr>
@@ -1169,7 +1169,7 @@
           <p:cNvPr id="6" name="Slide Number Placeholder 5">
             <a:extLst>
               <a:ext uri="{FF2B5EF4-FFF2-40B4-BE49-F238E27FC236}">
-                <a16:creationId xmlns:a16="http://schemas.microsoft.com/office/drawing/2014/main" id="{ACAACABE-5D1E-8B3D-8E68-7ACDCE89E04D}"/>
+                <a16:creationId xmlns:a16="http://schemas.microsoft.com/office/drawing/2014/main" id="{5F71CB32-D44D-0654-A367-C20D8E4B77C3}"/>
               </a:ext>
             </a:extLst>
           </p:cNvPr>
@@ -1185,7 +1185,7 @@
           <a:bodyPr/>
           <a:lstStyle/>
           <a:p>
-            <a:fld id="{8286AFE5-9E18-4557-886E-3E84579CFD30}" type="slidenum">
+            <a:fld id="{7189187B-99F4-4735-ABB4-FE66A9D55044}" type="slidenum">
               <a:rPr lang="en-US" smtClean="0"/>
               <a:t>‹#›</a:t>
             </a:fld>
@@ -1196,7 +1196,7 @@
     </p:spTree>
     <p:extLst>
       <p:ext uri="{BB962C8B-B14F-4D97-AF65-F5344CB8AC3E}">
-        <p14:creationId xmlns:p14="http://schemas.microsoft.com/office/powerpoint/2010/main" val="1566021364"/>
+        <p14:creationId xmlns:p14="http://schemas.microsoft.com/office/powerpoint/2010/main" val="2607181422"/>
       </p:ext>
     </p:extLst>
   </p:cSld>
@@ -1228,7 +1228,7 @@
           <p:cNvPr id="2" name="Title 1">
             <a:extLst>
               <a:ext uri="{FF2B5EF4-FFF2-40B4-BE49-F238E27FC236}">
-                <a16:creationId xmlns:a16="http://schemas.microsoft.com/office/drawing/2014/main" id="{6FE9291E-5956-D250-78AF-BBB9AA048FE9}"/>
+                <a16:creationId xmlns:a16="http://schemas.microsoft.com/office/drawing/2014/main" id="{60788E9A-C2F0-9FCB-0206-939E83F1DFC0}"/>
               </a:ext>
             </a:extLst>
           </p:cNvPr>
@@ -1256,7 +1256,7 @@
           <p:cNvPr id="3" name="Content Placeholder 2">
             <a:extLst>
               <a:ext uri="{FF2B5EF4-FFF2-40B4-BE49-F238E27FC236}">
-                <a16:creationId xmlns:a16="http://schemas.microsoft.com/office/drawing/2014/main" id="{F426FC7C-E41D-2FA3-DE95-3B57859B9F75}"/>
+                <a16:creationId xmlns:a16="http://schemas.microsoft.com/office/drawing/2014/main" id="{115E3D49-1617-46B6-EFAC-156B0117B5A3}"/>
               </a:ext>
             </a:extLst>
           </p:cNvPr>
@@ -1318,7 +1318,7 @@
           <p:cNvPr id="4" name="Content Placeholder 3">
             <a:extLst>
               <a:ext uri="{FF2B5EF4-FFF2-40B4-BE49-F238E27FC236}">
-                <a16:creationId xmlns:a16="http://schemas.microsoft.com/office/drawing/2014/main" id="{72177B5D-1D45-5503-2539-53AF4B6E38CB}"/>
+                <a16:creationId xmlns:a16="http://schemas.microsoft.com/office/drawing/2014/main" id="{DA4A7B39-F035-4A06-2AA5-A37B91DD3AC4}"/>
               </a:ext>
             </a:extLst>
           </p:cNvPr>
@@ -1380,7 +1380,7 @@
           <p:cNvPr id="5" name="Date Placeholder 4">
             <a:extLst>
               <a:ext uri="{FF2B5EF4-FFF2-40B4-BE49-F238E27FC236}">
-                <a16:creationId xmlns:a16="http://schemas.microsoft.com/office/drawing/2014/main" id="{645E3713-DFF2-35DA-6717-9489AB1A82C4}"/>
+                <a16:creationId xmlns:a16="http://schemas.microsoft.com/office/drawing/2014/main" id="{571F595A-2BD1-D7A2-36B6-2EB1D324FA0E}"/>
               </a:ext>
             </a:extLst>
           </p:cNvPr>
@@ -1396,7 +1396,7 @@
           <a:bodyPr/>
           <a:lstStyle/>
           <a:p>
-            <a:fld id="{93955E2D-8DBF-4645-9168-FD7B691BF237}" type="datetimeFigureOut">
+            <a:fld id="{9EA719E9-E1C7-4088-B20A-F699BC12EC34}" type="datetimeFigureOut">
               <a:rPr lang="en-US" smtClean="0"/>
               <a:t>6/25/2026</a:t>
             </a:fld>
@@ -1409,7 +1409,7 @@
           <p:cNvPr id="6" name="Footer Placeholder 5">
             <a:extLst>
               <a:ext uri="{FF2B5EF4-FFF2-40B4-BE49-F238E27FC236}">
-                <a16:creationId xmlns:a16="http://schemas.microsoft.com/office/drawing/2014/main" id="{0414B5D4-628D-691C-0880-7F5FD9AC77E6}"/>
+                <a16:creationId xmlns:a16="http://schemas.microsoft.com/office/drawing/2014/main" id="{95E3E892-741C-F88C-0AA7-8E9A2F0647E5}"/>
               </a:ext>
             </a:extLst>
           </p:cNvPr>
@@ -1434,7 +1434,7 @@
           <p:cNvPr id="7" name="Slide Number Placeholder 6">
             <a:extLst>
               <a:ext uri="{FF2B5EF4-FFF2-40B4-BE49-F238E27FC236}">
-                <a16:creationId xmlns:a16="http://schemas.microsoft.com/office/drawing/2014/main" id="{EE8216C9-BC37-3396-8A23-7DD77E717952}"/>
+                <a16:creationId xmlns:a16="http://schemas.microsoft.com/office/drawing/2014/main" id="{DC318401-4E16-657A-B7D4-4542798C250D}"/>
               </a:ext>
             </a:extLst>
           </p:cNvPr>
@@ -1450,7 +1450,7 @@
           <a:bodyPr/>
           <a:lstStyle/>
           <a:p>
-            <a:fld id="{8286AFE5-9E18-4557-886E-3E84579CFD30}" type="slidenum">
+            <a:fld id="{7189187B-99F4-4735-ABB4-FE66A9D55044}" type="slidenum">
               <a:rPr lang="en-US" smtClean="0"/>
               <a:t>‹#›</a:t>
             </a:fld>
@@ -1461,7 +1461,7 @@
     </p:spTree>
     <p:extLst>
       <p:ext uri="{BB962C8B-B14F-4D97-AF65-F5344CB8AC3E}">
-        <p14:creationId xmlns:p14="http://schemas.microsoft.com/office/powerpoint/2010/main" val="4249911511"/>
+        <p14:creationId xmlns:p14="http://schemas.microsoft.com/office/powerpoint/2010/main" val="984489619"/>
       </p:ext>
     </p:extLst>
   </p:cSld>
@@ -1493,7 +1493,7 @@
           <p:cNvPr id="2" name="Title 1">
             <a:extLst>
               <a:ext uri="{FF2B5EF4-FFF2-40B4-BE49-F238E27FC236}">
-                <a16:creationId xmlns:a16="http://schemas.microsoft.com/office/drawing/2014/main" id="{0A8ED00B-2FE4-30AA-05DA-68F4E1B551DF}"/>
+                <a16:creationId xmlns:a16="http://schemas.microsoft.com/office/drawing/2014/main" id="{8B626F73-3AD8-1703-EA55-9FF042A88E9F}"/>
               </a:ext>
             </a:extLst>
           </p:cNvPr>
@@ -1526,7 +1526,7 @@
           <p:cNvPr id="3" name="Text Placeholder 2">
             <a:extLst>
               <a:ext uri="{FF2B5EF4-FFF2-40B4-BE49-F238E27FC236}">
-                <a16:creationId xmlns:a16="http://schemas.microsoft.com/office/drawing/2014/main" id="{A2089993-D9BC-D46C-1BD7-7A857BF04D53}"/>
+                <a16:creationId xmlns:a16="http://schemas.microsoft.com/office/drawing/2014/main" id="{DDB2AEC6-5D31-3D0B-2523-542B78899065}"/>
               </a:ext>
             </a:extLst>
           </p:cNvPr>
@@ -1597,7 +1597,7 @@
           <p:cNvPr id="4" name="Content Placeholder 3">
             <a:extLst>
               <a:ext uri="{FF2B5EF4-FFF2-40B4-BE49-F238E27FC236}">
-                <a16:creationId xmlns:a16="http://schemas.microsoft.com/office/drawing/2014/main" id="{1585C726-AAB9-61EC-3C42-7AFA0D92721D}"/>
+                <a16:creationId xmlns:a16="http://schemas.microsoft.com/office/drawing/2014/main" id="{4971F4F5-E930-B78B-03BB-E7DC16ED3A04}"/>
               </a:ext>
             </a:extLst>
           </p:cNvPr>
@@ -1659,7 +1659,7 @@
           <p:cNvPr id="5" name="Text Placeholder 4">
             <a:extLst>
               <a:ext uri="{FF2B5EF4-FFF2-40B4-BE49-F238E27FC236}">
-                <a16:creationId xmlns:a16="http://schemas.microsoft.com/office/drawing/2014/main" id="{7690D41B-5364-40A7-B75E-98ADF0DAB4AF}"/>
+                <a16:creationId xmlns:a16="http://schemas.microsoft.com/office/drawing/2014/main" id="{E5B0A1D0-2CE2-09CD-C3C7-F47D1F0B8FFD}"/>
               </a:ext>
             </a:extLst>
           </p:cNvPr>
@@ -1730,7 +1730,7 @@
           <p:cNvPr id="6" name="Content Placeholder 5">
             <a:extLst>
               <a:ext uri="{FF2B5EF4-FFF2-40B4-BE49-F238E27FC236}">
-                <a16:creationId xmlns:a16="http://schemas.microsoft.com/office/drawing/2014/main" id="{B8EFD487-B2FD-F343-F9B7-6701C79FDC6F}"/>
+                <a16:creationId xmlns:a16="http://schemas.microsoft.com/office/drawing/2014/main" id="{01A0FAE3-A43C-F2B2-9CD1-8CF3D254C759}"/>
               </a:ext>
             </a:extLst>
           </p:cNvPr>
@@ -1792,7 +1792,7 @@
           <p:cNvPr id="7" name="Date Placeholder 6">
             <a:extLst>
               <a:ext uri="{FF2B5EF4-FFF2-40B4-BE49-F238E27FC236}">
-                <a16:creationId xmlns:a16="http://schemas.microsoft.com/office/drawing/2014/main" id="{DB7AEFF4-9E3E-4829-5F7E-7E4F71ACB490}"/>
+                <a16:creationId xmlns:a16="http://schemas.microsoft.com/office/drawing/2014/main" id="{05730BEF-83A0-9B19-8DAE-F7A622301247}"/>
               </a:ext>
             </a:extLst>
           </p:cNvPr>
@@ -1808,7 +1808,7 @@
           <a:bodyPr/>
           <a:lstStyle/>
           <a:p>
-            <a:fld id="{93955E2D-8DBF-4645-9168-FD7B691BF237}" type="datetimeFigureOut">
+            <a:fld id="{9EA719E9-E1C7-4088-B20A-F699BC12EC34}" type="datetimeFigureOut">
               <a:rPr lang="en-US" smtClean="0"/>
               <a:t>6/25/2026</a:t>
             </a:fld>
@@ -1821,7 +1821,7 @@
           <p:cNvPr id="8" name="Footer Placeholder 7">
             <a:extLst>
               <a:ext uri="{FF2B5EF4-FFF2-40B4-BE49-F238E27FC236}">
-                <a16:creationId xmlns:a16="http://schemas.microsoft.com/office/drawing/2014/main" id="{3B3D3FB9-A3F4-5B57-6699-337E5BEA30D6}"/>
+                <a16:creationId xmlns:a16="http://schemas.microsoft.com/office/drawing/2014/main" id="{5F199B2A-B624-2887-DA5E-D1EB1EB212AE}"/>
               </a:ext>
             </a:extLst>
           </p:cNvPr>
@@ -1846,7 +1846,7 @@
           <p:cNvPr id="9" name="Slide Number Placeholder 8">
             <a:extLst>
               <a:ext uri="{FF2B5EF4-FFF2-40B4-BE49-F238E27FC236}">
-                <a16:creationId xmlns:a16="http://schemas.microsoft.com/office/drawing/2014/main" id="{4C876699-E611-732E-0149-4F0C26F3A2AD}"/>
+                <a16:creationId xmlns:a16="http://schemas.microsoft.com/office/drawing/2014/main" id="{58C3308E-D361-F987-7202-0C4086E8B0EE}"/>
               </a:ext>
             </a:extLst>
           </p:cNvPr>
@@ -1862,7 +1862,7 @@
           <a:bodyPr/>
           <a:lstStyle/>
           <a:p>
-            <a:fld id="{8286AFE5-9E18-4557-886E-3E84579CFD30}" type="slidenum">
+            <a:fld id="{7189187B-99F4-4735-ABB4-FE66A9D55044}" type="slidenum">
               <a:rPr lang="en-US" smtClean="0"/>
               <a:t>‹#›</a:t>
             </a:fld>
@@ -1873,7 +1873,7 @@
     </p:spTree>
     <p:extLst>
       <p:ext uri="{BB962C8B-B14F-4D97-AF65-F5344CB8AC3E}">
-        <p14:creationId xmlns:p14="http://schemas.microsoft.com/office/powerpoint/2010/main" val="190386687"/>
+        <p14:creationId xmlns:p14="http://schemas.microsoft.com/office/powerpoint/2010/main" val="3120062895"/>
       </p:ext>
     </p:extLst>
   </p:cSld>
@@ -1905,7 +1905,7 @@
           <p:cNvPr id="2" name="Title 1">
             <a:extLst>
               <a:ext uri="{FF2B5EF4-FFF2-40B4-BE49-F238E27FC236}">
-                <a16:creationId xmlns:a16="http://schemas.microsoft.com/office/drawing/2014/main" id="{E911AD9E-3CD0-FBF2-B519-8E99DEB22F2B}"/>
+                <a16:creationId xmlns:a16="http://schemas.microsoft.com/office/drawing/2014/main" id="{B2B94F94-C20F-651D-057E-7E5EB78A0E5D}"/>
               </a:ext>
             </a:extLst>
           </p:cNvPr>
@@ -1933,7 +1933,7 @@
           <p:cNvPr id="3" name="Date Placeholder 2">
             <a:extLst>
               <a:ext uri="{FF2B5EF4-FFF2-40B4-BE49-F238E27FC236}">
-                <a16:creationId xmlns:a16="http://schemas.microsoft.com/office/drawing/2014/main" id="{C426FF5F-DD2A-D86F-B419-BFEB3266DF44}"/>
+                <a16:creationId xmlns:a16="http://schemas.microsoft.com/office/drawing/2014/main" id="{E8260E5E-A313-F673-037A-49BAE5320198}"/>
               </a:ext>
             </a:extLst>
           </p:cNvPr>
@@ -1949,7 +1949,7 @@
           <a:bodyPr/>
           <a:lstStyle/>
           <a:p>
-            <a:fld id="{93955E2D-8DBF-4645-9168-FD7B691BF237}" type="datetimeFigureOut">
+            <a:fld id="{9EA719E9-E1C7-4088-B20A-F699BC12EC34}" type="datetimeFigureOut">
               <a:rPr lang="en-US" smtClean="0"/>
               <a:t>6/25/2026</a:t>
             </a:fld>
@@ -1962,7 +1962,7 @@
           <p:cNvPr id="4" name="Footer Placeholder 3">
             <a:extLst>
               <a:ext uri="{FF2B5EF4-FFF2-40B4-BE49-F238E27FC236}">
-                <a16:creationId xmlns:a16="http://schemas.microsoft.com/office/drawing/2014/main" id="{5E45262D-5D6F-59F5-87D8-08A2BA0C0EA6}"/>
+                <a16:creationId xmlns:a16="http://schemas.microsoft.com/office/drawing/2014/main" id="{13D633C5-13F9-A4A8-023C-1C6F669076E5}"/>
               </a:ext>
             </a:extLst>
           </p:cNvPr>
@@ -1987,7 +1987,7 @@
           <p:cNvPr id="5" name="Slide Number Placeholder 4">
             <a:extLst>
               <a:ext uri="{FF2B5EF4-FFF2-40B4-BE49-F238E27FC236}">
-                <a16:creationId xmlns:a16="http://schemas.microsoft.com/office/drawing/2014/main" id="{F5CBE18F-106B-82EE-0CE9-5A103CE88BF4}"/>
+                <a16:creationId xmlns:a16="http://schemas.microsoft.com/office/drawing/2014/main" id="{3533EA0B-4032-B2F7-74C9-D64C3A63436B}"/>
               </a:ext>
             </a:extLst>
           </p:cNvPr>
@@ -2003,7 +2003,7 @@
           <a:bodyPr/>
           <a:lstStyle/>
           <a:p>
-            <a:fld id="{8286AFE5-9E18-4557-886E-3E84579CFD30}" type="slidenum">
+            <a:fld id="{7189187B-99F4-4735-ABB4-FE66A9D55044}" type="slidenum">
               <a:rPr lang="en-US" smtClean="0"/>
               <a:t>‹#›</a:t>
             </a:fld>
@@ -2014,7 +2014,7 @@
     </p:spTree>
     <p:extLst>
       <p:ext uri="{BB962C8B-B14F-4D97-AF65-F5344CB8AC3E}">
-        <p14:creationId xmlns:p14="http://schemas.microsoft.com/office/powerpoint/2010/main" val="2383045173"/>
+        <p14:creationId xmlns:p14="http://schemas.microsoft.com/office/powerpoint/2010/main" val="2773315420"/>
       </p:ext>
     </p:extLst>
   </p:cSld>
@@ -2046,7 +2046,7 @@
           <p:cNvPr id="2" name="Date Placeholder 1">
             <a:extLst>
               <a:ext uri="{FF2B5EF4-FFF2-40B4-BE49-F238E27FC236}">
-                <a16:creationId xmlns:a16="http://schemas.microsoft.com/office/drawing/2014/main" id="{01605F21-FCEF-7CF3-6E64-019EDEE8349B}"/>
+                <a16:creationId xmlns:a16="http://schemas.microsoft.com/office/drawing/2014/main" id="{4D918616-F9EF-E694-95DC-FC24637EBE2E}"/>
               </a:ext>
             </a:extLst>
           </p:cNvPr>
@@ -2062,7 +2062,7 @@
           <a:bodyPr/>
           <a:lstStyle/>
           <a:p>
-            <a:fld id="{93955E2D-8DBF-4645-9168-FD7B691BF237}" type="datetimeFigureOut">
+            <a:fld id="{9EA719E9-E1C7-4088-B20A-F699BC12EC34}" type="datetimeFigureOut">
               <a:rPr lang="en-US" smtClean="0"/>
               <a:t>6/25/2026</a:t>
             </a:fld>
@@ -2075,7 +2075,7 @@
           <p:cNvPr id="3" name="Footer Placeholder 2">
             <a:extLst>
               <a:ext uri="{FF2B5EF4-FFF2-40B4-BE49-F238E27FC236}">
-                <a16:creationId xmlns:a16="http://schemas.microsoft.com/office/drawing/2014/main" id="{B30B2845-C65E-F42F-8189-DE1A92797AB7}"/>
+                <a16:creationId xmlns:a16="http://schemas.microsoft.com/office/drawing/2014/main" id="{794FAAE0-59FC-5BB9-4FE5-90B0B475437D}"/>
               </a:ext>
             </a:extLst>
           </p:cNvPr>
@@ -2100,7 +2100,7 @@
           <p:cNvPr id="4" name="Slide Number Placeholder 3">
             <a:extLst>
               <a:ext uri="{FF2B5EF4-FFF2-40B4-BE49-F238E27FC236}">
-                <a16:creationId xmlns:a16="http://schemas.microsoft.com/office/drawing/2014/main" id="{1A89EE4B-788F-E731-396A-FCF314C1D666}"/>
+                <a16:creationId xmlns:a16="http://schemas.microsoft.com/office/drawing/2014/main" id="{3076CD70-CD8F-3988-5DFB-B7CE4EE045DA}"/>
               </a:ext>
             </a:extLst>
           </p:cNvPr>
@@ -2116,7 +2116,7 @@
           <a:bodyPr/>
           <a:lstStyle/>
           <a:p>
-            <a:fld id="{8286AFE5-9E18-4557-886E-3E84579CFD30}" type="slidenum">
+            <a:fld id="{7189187B-99F4-4735-ABB4-FE66A9D55044}" type="slidenum">
               <a:rPr lang="en-US" smtClean="0"/>
               <a:t>‹#›</a:t>
             </a:fld>
@@ -2127,7 +2127,7 @@
     </p:spTree>
     <p:extLst>
       <p:ext uri="{BB962C8B-B14F-4D97-AF65-F5344CB8AC3E}">
-        <p14:creationId xmlns:p14="http://schemas.microsoft.com/office/powerpoint/2010/main" val="2237324614"/>
+        <p14:creationId xmlns:p14="http://schemas.microsoft.com/office/powerpoint/2010/main" val="3801195954"/>
       </p:ext>
     </p:extLst>
   </p:cSld>
@@ -2159,7 +2159,7 @@
           <p:cNvPr id="2" name="Title 1">
             <a:extLst>
               <a:ext uri="{FF2B5EF4-FFF2-40B4-BE49-F238E27FC236}">
-                <a16:creationId xmlns:a16="http://schemas.microsoft.com/office/drawing/2014/main" id="{2630B648-EF33-C321-04C7-E77BFA73A390}"/>
+                <a16:creationId xmlns:a16="http://schemas.microsoft.com/office/drawing/2014/main" id="{905BBBED-A5F5-2C4D-B57C-8154504D0D5D}"/>
               </a:ext>
             </a:extLst>
           </p:cNvPr>
@@ -2196,7 +2196,7 @@
           <p:cNvPr id="3" name="Content Placeholder 2">
             <a:extLst>
               <a:ext uri="{FF2B5EF4-FFF2-40B4-BE49-F238E27FC236}">
-                <a16:creationId xmlns:a16="http://schemas.microsoft.com/office/drawing/2014/main" id="{E95D01CA-42BD-EE1C-41FA-8E0F07370664}"/>
+                <a16:creationId xmlns:a16="http://schemas.microsoft.com/office/drawing/2014/main" id="{9E4F2A2E-D591-CFCF-A9AE-21770EA1F147}"/>
               </a:ext>
             </a:extLst>
           </p:cNvPr>
@@ -2286,7 +2286,7 @@
           <p:cNvPr id="4" name="Text Placeholder 3">
             <a:extLst>
               <a:ext uri="{FF2B5EF4-FFF2-40B4-BE49-F238E27FC236}">
-                <a16:creationId xmlns:a16="http://schemas.microsoft.com/office/drawing/2014/main" id="{C20BF4CC-6E70-7ED2-4D62-ED7976B6404D}"/>
+                <a16:creationId xmlns:a16="http://schemas.microsoft.com/office/drawing/2014/main" id="{42E8B549-7E47-E14A-33D5-BCB073F77D64}"/>
               </a:ext>
             </a:extLst>
           </p:cNvPr>
@@ -2357,7 +2357,7 @@
           <p:cNvPr id="5" name="Date Placeholder 4">
             <a:extLst>
               <a:ext uri="{FF2B5EF4-FFF2-40B4-BE49-F238E27FC236}">
-                <a16:creationId xmlns:a16="http://schemas.microsoft.com/office/drawing/2014/main" id="{1B6D6982-876C-D58A-1ACC-B8F0C1043545}"/>
+                <a16:creationId xmlns:a16="http://schemas.microsoft.com/office/drawing/2014/main" id="{64051601-AA87-561B-A203-3970061C85BF}"/>
               </a:ext>
             </a:extLst>
           </p:cNvPr>
@@ -2373,7 +2373,7 @@
           <a:bodyPr/>
           <a:lstStyle/>
           <a:p>
-            <a:fld id="{93955E2D-8DBF-4645-9168-FD7B691BF237}" type="datetimeFigureOut">
+            <a:fld id="{9EA719E9-E1C7-4088-B20A-F699BC12EC34}" type="datetimeFigureOut">
               <a:rPr lang="en-US" smtClean="0"/>
               <a:t>6/25/2026</a:t>
             </a:fld>
@@ -2386,7 +2386,7 @@
           <p:cNvPr id="6" name="Footer Placeholder 5">
             <a:extLst>
               <a:ext uri="{FF2B5EF4-FFF2-40B4-BE49-F238E27FC236}">
-                <a16:creationId xmlns:a16="http://schemas.microsoft.com/office/drawing/2014/main" id="{5DE6F957-550D-40C2-BC54-87BD8345044A}"/>
+                <a16:creationId xmlns:a16="http://schemas.microsoft.com/office/drawing/2014/main" id="{587D81CC-45A0-EFED-F778-5F143E7D1182}"/>
               </a:ext>
             </a:extLst>
           </p:cNvPr>
@@ -2411,7 +2411,7 @@
           <p:cNvPr id="7" name="Slide Number Placeholder 6">
             <a:extLst>
               <a:ext uri="{FF2B5EF4-FFF2-40B4-BE49-F238E27FC236}">
-                <a16:creationId xmlns:a16="http://schemas.microsoft.com/office/drawing/2014/main" id="{AC68AD89-B66E-27AC-2F59-18916CEBFAA5}"/>
+                <a16:creationId xmlns:a16="http://schemas.microsoft.com/office/drawing/2014/main" id="{DB1F4D8A-ADF0-9A32-6A6B-4280D3662319}"/>
               </a:ext>
             </a:extLst>
           </p:cNvPr>
@@ -2427,7 +2427,7 @@
           <a:bodyPr/>
           <a:lstStyle/>
           <a:p>
-            <a:fld id="{8286AFE5-9E18-4557-886E-3E84579CFD30}" type="slidenum">
+            <a:fld id="{7189187B-99F4-4735-ABB4-FE66A9D55044}" type="slidenum">
               <a:rPr lang="en-US" smtClean="0"/>
               <a:t>‹#›</a:t>
             </a:fld>
@@ -2438,7 +2438,7 @@
     </p:spTree>
     <p:extLst>
       <p:ext uri="{BB962C8B-B14F-4D97-AF65-F5344CB8AC3E}">
-        <p14:creationId xmlns:p14="http://schemas.microsoft.com/office/powerpoint/2010/main" val="4196887815"/>
+        <p14:creationId xmlns:p14="http://schemas.microsoft.com/office/powerpoint/2010/main" val="2641063607"/>
       </p:ext>
     </p:extLst>
   </p:cSld>
@@ -2470,7 +2470,7 @@
           <p:cNvPr id="2" name="Title 1">
             <a:extLst>
               <a:ext uri="{FF2B5EF4-FFF2-40B4-BE49-F238E27FC236}">
-                <a16:creationId xmlns:a16="http://schemas.microsoft.com/office/drawing/2014/main" id="{0130033D-9C35-BAFA-7B6F-4B53D5D9609E}"/>
+                <a16:creationId xmlns:a16="http://schemas.microsoft.com/office/drawing/2014/main" id="{4DEDCC64-8079-ED3C-22A7-E5E0817984C0}"/>
               </a:ext>
             </a:extLst>
           </p:cNvPr>
@@ -2507,7 +2507,7 @@
           <p:cNvPr id="3" name="Picture Placeholder 2">
             <a:extLst>
               <a:ext uri="{FF2B5EF4-FFF2-40B4-BE49-F238E27FC236}">
-                <a16:creationId xmlns:a16="http://schemas.microsoft.com/office/drawing/2014/main" id="{1A9102B6-5707-64F0-B7C0-9A38E14F6522}"/>
+                <a16:creationId xmlns:a16="http://schemas.microsoft.com/office/drawing/2014/main" id="{7E98BCC5-D742-05B3-FF3C-0F96079A080A}"/>
               </a:ext>
             </a:extLst>
           </p:cNvPr>
@@ -2574,7 +2574,7 @@
           <p:cNvPr id="4" name="Text Placeholder 3">
             <a:extLst>
               <a:ext uri="{FF2B5EF4-FFF2-40B4-BE49-F238E27FC236}">
-                <a16:creationId xmlns:a16="http://schemas.microsoft.com/office/drawing/2014/main" id="{CB9F7292-1B77-38B7-9C1B-30903EA04AE7}"/>
+                <a16:creationId xmlns:a16="http://schemas.microsoft.com/office/drawing/2014/main" id="{BB19143B-34B6-A43E-B313-BF9F76456396}"/>
               </a:ext>
             </a:extLst>
           </p:cNvPr>
@@ -2645,7 +2645,7 @@
           <p:cNvPr id="5" name="Date Placeholder 4">
             <a:extLst>
               <a:ext uri="{FF2B5EF4-FFF2-40B4-BE49-F238E27FC236}">
-                <a16:creationId xmlns:a16="http://schemas.microsoft.com/office/drawing/2014/main" id="{A974C900-93B6-7446-EA65-073D7ED6560F}"/>
+                <a16:creationId xmlns:a16="http://schemas.microsoft.com/office/drawing/2014/main" id="{1B56CDB2-B74D-B6AA-7854-AC077EB19309}"/>
               </a:ext>
             </a:extLst>
           </p:cNvPr>
@@ -2661,7 +2661,7 @@
           <a:bodyPr/>
           <a:lstStyle/>
           <a:p>
-            <a:fld id="{93955E2D-8DBF-4645-9168-FD7B691BF237}" type="datetimeFigureOut">
+            <a:fld id="{9EA719E9-E1C7-4088-B20A-F699BC12EC34}" type="datetimeFigureOut">
               <a:rPr lang="en-US" smtClean="0"/>
               <a:t>6/25/2026</a:t>
             </a:fld>
@@ -2674,7 +2674,7 @@
           <p:cNvPr id="6" name="Footer Placeholder 5">
             <a:extLst>
               <a:ext uri="{FF2B5EF4-FFF2-40B4-BE49-F238E27FC236}">
-                <a16:creationId xmlns:a16="http://schemas.microsoft.com/office/drawing/2014/main" id="{A21597A5-1510-9C6F-1759-ECC553C6589D}"/>
+                <a16:creationId xmlns:a16="http://schemas.microsoft.com/office/drawing/2014/main" id="{D27C2332-8778-5319-89EB-8B62FBBA4EA8}"/>
               </a:ext>
             </a:extLst>
           </p:cNvPr>
@@ -2699,7 +2699,7 @@
           <p:cNvPr id="7" name="Slide Number Placeholder 6">
             <a:extLst>
               <a:ext uri="{FF2B5EF4-FFF2-40B4-BE49-F238E27FC236}">
-                <a16:creationId xmlns:a16="http://schemas.microsoft.com/office/drawing/2014/main" id="{1CE278FC-D73E-1CAB-35AA-0E24E3B5DF16}"/>
+                <a16:creationId xmlns:a16="http://schemas.microsoft.com/office/drawing/2014/main" id="{EF0B0075-F565-A6AC-5B1C-79B231C4681C}"/>
               </a:ext>
             </a:extLst>
           </p:cNvPr>
@@ -2715,7 +2715,7 @@
           <a:bodyPr/>
           <a:lstStyle/>
           <a:p>
-            <a:fld id="{8286AFE5-9E18-4557-886E-3E84579CFD30}" type="slidenum">
+            <a:fld id="{7189187B-99F4-4735-ABB4-FE66A9D55044}" type="slidenum">
               <a:rPr lang="en-US" smtClean="0"/>
               <a:t>‹#›</a:t>
             </a:fld>
@@ -2726,7 +2726,7 @@
     </p:spTree>
     <p:extLst>
       <p:ext uri="{BB962C8B-B14F-4D97-AF65-F5344CB8AC3E}">
-        <p14:creationId xmlns:p14="http://schemas.microsoft.com/office/powerpoint/2010/main" val="3418078532"/>
+        <p14:creationId xmlns:p14="http://schemas.microsoft.com/office/powerpoint/2010/main" val="2130529523"/>
       </p:ext>
     </p:extLst>
   </p:cSld>
@@ -2763,7 +2763,7 @@
           <p:cNvPr id="2" name="Title Placeholder 1">
             <a:extLst>
               <a:ext uri="{FF2B5EF4-FFF2-40B4-BE49-F238E27FC236}">
-                <a16:creationId xmlns:a16="http://schemas.microsoft.com/office/drawing/2014/main" id="{2C2F98B1-D7F3-A170-01A7-DE4CDE74E1F4}"/>
+                <a16:creationId xmlns:a16="http://schemas.microsoft.com/office/drawing/2014/main" id="{F85D9565-23FD-200D-61BF-1F297335820F}"/>
               </a:ext>
             </a:extLst>
           </p:cNvPr>
@@ -2801,7 +2801,7 @@
           <p:cNvPr id="3" name="Text Placeholder 2">
             <a:extLst>
               <a:ext uri="{FF2B5EF4-FFF2-40B4-BE49-F238E27FC236}">
-                <a16:creationId xmlns:a16="http://schemas.microsoft.com/office/drawing/2014/main" id="{73A5C6BF-58D4-95D2-EC17-236533BA86EC}"/>
+                <a16:creationId xmlns:a16="http://schemas.microsoft.com/office/drawing/2014/main" id="{37583980-9581-88F4-A5A9-BAB3062506AC}"/>
               </a:ext>
             </a:extLst>
           </p:cNvPr>
@@ -2868,7 +2868,7 @@
           <p:cNvPr id="4" name="Date Placeholder 3">
             <a:extLst>
               <a:ext uri="{FF2B5EF4-FFF2-40B4-BE49-F238E27FC236}">
-                <a16:creationId xmlns:a16="http://schemas.microsoft.com/office/drawing/2014/main" id="{7368A97E-AD16-2CD4-890B-A4CA973FD307}"/>
+                <a16:creationId xmlns:a16="http://schemas.microsoft.com/office/drawing/2014/main" id="{46B48FC3-316C-86B9-89A4-D9A33541240A}"/>
               </a:ext>
             </a:extLst>
           </p:cNvPr>
@@ -2902,7 +2902,7 @@
             </a:lvl1pPr>
           </a:lstStyle>
           <a:p>
-            <a:fld id="{93955E2D-8DBF-4645-9168-FD7B691BF237}" type="datetimeFigureOut">
+            <a:fld id="{9EA719E9-E1C7-4088-B20A-F699BC12EC34}" type="datetimeFigureOut">
               <a:rPr lang="en-US" smtClean="0"/>
               <a:t>6/25/2026</a:t>
             </a:fld>
@@ -2915,7 +2915,7 @@
           <p:cNvPr id="5" name="Footer Placeholder 4">
             <a:extLst>
               <a:ext uri="{FF2B5EF4-FFF2-40B4-BE49-F238E27FC236}">
-                <a16:creationId xmlns:a16="http://schemas.microsoft.com/office/drawing/2014/main" id="{4BCA53FD-6A55-ABE3-82AF-886B354461BD}"/>
+                <a16:creationId xmlns:a16="http://schemas.microsoft.com/office/drawing/2014/main" id="{C6C415C9-2506-3A89-B674-48C9BCD910BE}"/>
               </a:ext>
             </a:extLst>
           </p:cNvPr>
@@ -2958,7 +2958,7 @@
           <p:cNvPr id="6" name="Slide Number Placeholder 5">
             <a:extLst>
               <a:ext uri="{FF2B5EF4-FFF2-40B4-BE49-F238E27FC236}">
-                <a16:creationId xmlns:a16="http://schemas.microsoft.com/office/drawing/2014/main" id="{91BC8872-56F0-041F-E2EE-3283F8BF7AC9}"/>
+                <a16:creationId xmlns:a16="http://schemas.microsoft.com/office/drawing/2014/main" id="{149285F1-F0BC-C046-7F93-4B1DABA09E25}"/>
               </a:ext>
             </a:extLst>
           </p:cNvPr>
@@ -2992,7 +2992,7 @@
             </a:lvl1pPr>
           </a:lstStyle>
           <a:p>
-            <a:fld id="{8286AFE5-9E18-4557-886E-3E84579CFD30}" type="slidenum">
+            <a:fld id="{7189187B-99F4-4735-ABB4-FE66A9D55044}" type="slidenum">
               <a:rPr lang="en-US" smtClean="0"/>
               <a:t>‹#›</a:t>
             </a:fld>
@@ -3003,7 +3003,7 @@
     </p:spTree>
     <p:extLst>
       <p:ext uri="{BB962C8B-B14F-4D97-AF65-F5344CB8AC3E}">
-        <p14:creationId xmlns:p14="http://schemas.microsoft.com/office/powerpoint/2010/main" val="884963187"/>
+        <p14:creationId xmlns:p14="http://schemas.microsoft.com/office/powerpoint/2010/main" val="3910722933"/>
       </p:ext>
     </p:extLst>
   </p:cSld>
@@ -3326,7 +3326,7 @@
           <p:cNvPr id="3" name="TestPicture">
             <a:extLst>
               <a:ext uri="{FF2B5EF4-FFF2-40B4-BE49-F238E27FC236}">
-                <a16:creationId xmlns:a16="http://schemas.microsoft.com/office/drawing/2014/main" id="{8C8849D0-85EE-7C6E-2FE0-06B63E7F6905}"/>
+                <a16:creationId xmlns:a16="http://schemas.microsoft.com/office/drawing/2014/main" id="{AF5345A4-0B51-994C-A8CD-B29EDAC62014}"/>
               </a:ext>
             </a:extLst>
           </p:cNvPr>
@@ -3362,7 +3362,7 @@
           <p:cNvPr id="4" name="TextBox 3">
             <a:extLst>
               <a:ext uri="{FF2B5EF4-FFF2-40B4-BE49-F238E27FC236}">
-                <a16:creationId xmlns:a16="http://schemas.microsoft.com/office/drawing/2014/main" id="{CD91DBE8-3DAE-7B2E-B1E7-2B06C8329FD9}"/>
+                <a16:creationId xmlns:a16="http://schemas.microsoft.com/office/drawing/2014/main" id="{138CECD4-F00C-36D6-679A-77E64FD39828}"/>
               </a:ext>
             </a:extLst>
           </p:cNvPr>
@@ -3395,7 +3395,7 @@
     </p:spTree>
     <p:extLst>
       <p:ext uri="{BB962C8B-B14F-4D97-AF65-F5344CB8AC3E}">
-        <p14:creationId xmlns:p14="http://schemas.microsoft.com/office/powerpoint/2010/main" val="2807212664"/>
+        <p14:creationId xmlns:p14="http://schemas.microsoft.com/office/powerpoint/2010/main" val="3392116042"/>
       </p:ext>
     </p:extLst>
   </p:cSld>

--- a/tools/FreeP.RenderCompare/corpus/04-picture.pptx
+++ b/tools/FreeP.RenderCompare/corpus/04-picture.pptx
@@ -129,7 +129,7 @@
           <p:cNvPr id="2" name="Title 1">
             <a:extLst>
               <a:ext uri="{FF2B5EF4-FFF2-40B4-BE49-F238E27FC236}">
-                <a16:creationId xmlns:a16="http://schemas.microsoft.com/office/drawing/2014/main" id="{15E09068-0C80-9F65-93BD-F3B18FEA1BB6}"/>
+                <a16:creationId xmlns:a16="http://schemas.microsoft.com/office/drawing/2014/main" id="{B2383597-A3B7-80CD-EFAF-9CE40D2837A4}"/>
               </a:ext>
             </a:extLst>
           </p:cNvPr>
@@ -166,7 +166,7 @@
           <p:cNvPr id="3" name="Subtitle 2">
             <a:extLst>
               <a:ext uri="{FF2B5EF4-FFF2-40B4-BE49-F238E27FC236}">
-                <a16:creationId xmlns:a16="http://schemas.microsoft.com/office/drawing/2014/main" id="{0C53C1C7-7FF0-97EB-858F-36ED6CDC6F0D}"/>
+                <a16:creationId xmlns:a16="http://schemas.microsoft.com/office/drawing/2014/main" id="{740BA03A-C463-D06D-B06F-08D5095DFDE0}"/>
               </a:ext>
             </a:extLst>
           </p:cNvPr>
@@ -236,7 +236,7 @@
           <p:cNvPr id="4" name="Date Placeholder 3">
             <a:extLst>
               <a:ext uri="{FF2B5EF4-FFF2-40B4-BE49-F238E27FC236}">
-                <a16:creationId xmlns:a16="http://schemas.microsoft.com/office/drawing/2014/main" id="{487E6DB1-3C01-F879-57A6-1E62C41B96BC}"/>
+                <a16:creationId xmlns:a16="http://schemas.microsoft.com/office/drawing/2014/main" id="{A95C421F-A244-1604-DB8B-F90C4E4DFA8F}"/>
               </a:ext>
             </a:extLst>
           </p:cNvPr>
@@ -252,9 +252,9 @@
           <a:bodyPr/>
           <a:lstStyle/>
           <a:p>
-            <a:fld id="{9EA719E9-E1C7-4088-B20A-F699BC12EC34}" type="datetimeFigureOut">
+            <a:fld id="{A0A566AB-29BE-4B7F-AC17-D3FD8657D75D}" type="datetimeFigureOut">
               <a:rPr lang="en-US" smtClean="0"/>
-              <a:t>6/25/2026</a:t>
+              <a:t>6/26/2026</a:t>
             </a:fld>
             <a:endParaRPr lang="en-US"/>
           </a:p>
@@ -265,7 +265,7 @@
           <p:cNvPr id="5" name="Footer Placeholder 4">
             <a:extLst>
               <a:ext uri="{FF2B5EF4-FFF2-40B4-BE49-F238E27FC236}">
-                <a16:creationId xmlns:a16="http://schemas.microsoft.com/office/drawing/2014/main" id="{C89FAC85-D419-55CE-B9DB-75EC30AA7A64}"/>
+                <a16:creationId xmlns:a16="http://schemas.microsoft.com/office/drawing/2014/main" id="{0436261D-304F-9D28-44F9-431D121E7606}"/>
               </a:ext>
             </a:extLst>
           </p:cNvPr>
@@ -290,7 +290,7 @@
           <p:cNvPr id="6" name="Slide Number Placeholder 5">
             <a:extLst>
               <a:ext uri="{FF2B5EF4-FFF2-40B4-BE49-F238E27FC236}">
-                <a16:creationId xmlns:a16="http://schemas.microsoft.com/office/drawing/2014/main" id="{A1925A42-820E-8C4A-17B9-5716DBAA2982}"/>
+                <a16:creationId xmlns:a16="http://schemas.microsoft.com/office/drawing/2014/main" id="{8620CD5B-7AEC-63B4-0F40-070D36B36095}"/>
               </a:ext>
             </a:extLst>
           </p:cNvPr>
@@ -306,7 +306,7 @@
           <a:bodyPr/>
           <a:lstStyle/>
           <a:p>
-            <a:fld id="{7189187B-99F4-4735-ABB4-FE66A9D55044}" type="slidenum">
+            <a:fld id="{B314AA40-287F-4044-9DA8-666BB2934E1F}" type="slidenum">
               <a:rPr lang="en-US" smtClean="0"/>
               <a:t>‹#›</a:t>
             </a:fld>
@@ -317,7 +317,7 @@
     </p:spTree>
     <p:extLst>
       <p:ext uri="{BB962C8B-B14F-4D97-AF65-F5344CB8AC3E}">
-        <p14:creationId xmlns:p14="http://schemas.microsoft.com/office/powerpoint/2010/main" val="2820323411"/>
+        <p14:creationId xmlns:p14="http://schemas.microsoft.com/office/powerpoint/2010/main" val="325057989"/>
       </p:ext>
     </p:extLst>
   </p:cSld>
@@ -349,7 +349,7 @@
           <p:cNvPr id="2" name="Title 1">
             <a:extLst>
               <a:ext uri="{FF2B5EF4-FFF2-40B4-BE49-F238E27FC236}">
-                <a16:creationId xmlns:a16="http://schemas.microsoft.com/office/drawing/2014/main" id="{6A90EB0C-D25C-30A0-CD23-C5D69A231158}"/>
+                <a16:creationId xmlns:a16="http://schemas.microsoft.com/office/drawing/2014/main" id="{2CE000A0-59B2-CC44-A91F-149EEA745D57}"/>
               </a:ext>
             </a:extLst>
           </p:cNvPr>
@@ -377,7 +377,7 @@
           <p:cNvPr id="3" name="Vertical Text Placeholder 2">
             <a:extLst>
               <a:ext uri="{FF2B5EF4-FFF2-40B4-BE49-F238E27FC236}">
-                <a16:creationId xmlns:a16="http://schemas.microsoft.com/office/drawing/2014/main" id="{71D4D8CC-4820-6C8B-FD26-D458D916C1F6}"/>
+                <a16:creationId xmlns:a16="http://schemas.microsoft.com/office/drawing/2014/main" id="{F1E093E8-294F-D537-E8EE-B3FB7D4C00F7}"/>
               </a:ext>
             </a:extLst>
           </p:cNvPr>
@@ -434,7 +434,7 @@
           <p:cNvPr id="4" name="Date Placeholder 3">
             <a:extLst>
               <a:ext uri="{FF2B5EF4-FFF2-40B4-BE49-F238E27FC236}">
-                <a16:creationId xmlns:a16="http://schemas.microsoft.com/office/drawing/2014/main" id="{5DC592D0-6B23-0E28-6A3D-599601F2CDE9}"/>
+                <a16:creationId xmlns:a16="http://schemas.microsoft.com/office/drawing/2014/main" id="{CCB0CC43-65C0-8112-ECBE-DF2FE9DC36A6}"/>
               </a:ext>
             </a:extLst>
           </p:cNvPr>
@@ -450,9 +450,9 @@
           <a:bodyPr/>
           <a:lstStyle/>
           <a:p>
-            <a:fld id="{9EA719E9-E1C7-4088-B20A-F699BC12EC34}" type="datetimeFigureOut">
+            <a:fld id="{A0A566AB-29BE-4B7F-AC17-D3FD8657D75D}" type="datetimeFigureOut">
               <a:rPr lang="en-US" smtClean="0"/>
-              <a:t>6/25/2026</a:t>
+              <a:t>6/26/2026</a:t>
             </a:fld>
             <a:endParaRPr lang="en-US"/>
           </a:p>
@@ -463,7 +463,7 @@
           <p:cNvPr id="5" name="Footer Placeholder 4">
             <a:extLst>
               <a:ext uri="{FF2B5EF4-FFF2-40B4-BE49-F238E27FC236}">
-                <a16:creationId xmlns:a16="http://schemas.microsoft.com/office/drawing/2014/main" id="{80AA1507-140B-AD60-5BAA-9ECCB8A2CF53}"/>
+                <a16:creationId xmlns:a16="http://schemas.microsoft.com/office/drawing/2014/main" id="{9B261AD3-8CF0-5A3B-8EC2-9B20D85C594A}"/>
               </a:ext>
             </a:extLst>
           </p:cNvPr>
@@ -488,7 +488,7 @@
           <p:cNvPr id="6" name="Slide Number Placeholder 5">
             <a:extLst>
               <a:ext uri="{FF2B5EF4-FFF2-40B4-BE49-F238E27FC236}">
-                <a16:creationId xmlns:a16="http://schemas.microsoft.com/office/drawing/2014/main" id="{AE10D673-29B1-D439-C94F-36F48E7B9C02}"/>
+                <a16:creationId xmlns:a16="http://schemas.microsoft.com/office/drawing/2014/main" id="{4C9FD013-D09F-00E6-F0B6-716CEBA709EA}"/>
               </a:ext>
             </a:extLst>
           </p:cNvPr>
@@ -504,7 +504,7 @@
           <a:bodyPr/>
           <a:lstStyle/>
           <a:p>
-            <a:fld id="{7189187B-99F4-4735-ABB4-FE66A9D55044}" type="slidenum">
+            <a:fld id="{B314AA40-287F-4044-9DA8-666BB2934E1F}" type="slidenum">
               <a:rPr lang="en-US" smtClean="0"/>
               <a:t>‹#›</a:t>
             </a:fld>
@@ -515,7 +515,7 @@
     </p:spTree>
     <p:extLst>
       <p:ext uri="{BB962C8B-B14F-4D97-AF65-F5344CB8AC3E}">
-        <p14:creationId xmlns:p14="http://schemas.microsoft.com/office/powerpoint/2010/main" val="2811021271"/>
+        <p14:creationId xmlns:p14="http://schemas.microsoft.com/office/powerpoint/2010/main" val="3800478079"/>
       </p:ext>
     </p:extLst>
   </p:cSld>
@@ -547,7 +547,7 @@
           <p:cNvPr id="2" name="Vertical Title 1">
             <a:extLst>
               <a:ext uri="{FF2B5EF4-FFF2-40B4-BE49-F238E27FC236}">
-                <a16:creationId xmlns:a16="http://schemas.microsoft.com/office/drawing/2014/main" id="{E3F2A4AE-504A-46F9-2514-3D980292A127}"/>
+                <a16:creationId xmlns:a16="http://schemas.microsoft.com/office/drawing/2014/main" id="{BF11630D-E9AB-20B9-3D99-A958D0ECB83F}"/>
               </a:ext>
             </a:extLst>
           </p:cNvPr>
@@ -580,7 +580,7 @@
           <p:cNvPr id="3" name="Vertical Text Placeholder 2">
             <a:extLst>
               <a:ext uri="{FF2B5EF4-FFF2-40B4-BE49-F238E27FC236}">
-                <a16:creationId xmlns:a16="http://schemas.microsoft.com/office/drawing/2014/main" id="{AC5E2D63-8108-AED1-8C58-EFE336B89295}"/>
+                <a16:creationId xmlns:a16="http://schemas.microsoft.com/office/drawing/2014/main" id="{F1799823-ADA5-F577-8059-F0739668F255}"/>
               </a:ext>
             </a:extLst>
           </p:cNvPr>
@@ -642,7 +642,7 @@
           <p:cNvPr id="4" name="Date Placeholder 3">
             <a:extLst>
               <a:ext uri="{FF2B5EF4-FFF2-40B4-BE49-F238E27FC236}">
-                <a16:creationId xmlns:a16="http://schemas.microsoft.com/office/drawing/2014/main" id="{73A2F0E7-DB96-84E0-E63F-4A2ABF00B8DD}"/>
+                <a16:creationId xmlns:a16="http://schemas.microsoft.com/office/drawing/2014/main" id="{22BE01A8-D5DB-166F-7AE6-01558005C16B}"/>
               </a:ext>
             </a:extLst>
           </p:cNvPr>
@@ -658,9 +658,9 @@
           <a:bodyPr/>
           <a:lstStyle/>
           <a:p>
-            <a:fld id="{9EA719E9-E1C7-4088-B20A-F699BC12EC34}" type="datetimeFigureOut">
+            <a:fld id="{A0A566AB-29BE-4B7F-AC17-D3FD8657D75D}" type="datetimeFigureOut">
               <a:rPr lang="en-US" smtClean="0"/>
-              <a:t>6/25/2026</a:t>
+              <a:t>6/26/2026</a:t>
             </a:fld>
             <a:endParaRPr lang="en-US"/>
           </a:p>
@@ -671,7 +671,7 @@
           <p:cNvPr id="5" name="Footer Placeholder 4">
             <a:extLst>
               <a:ext uri="{FF2B5EF4-FFF2-40B4-BE49-F238E27FC236}">
-                <a16:creationId xmlns:a16="http://schemas.microsoft.com/office/drawing/2014/main" id="{23BBE223-A527-0A3F-1A6F-302015C396E8}"/>
+                <a16:creationId xmlns:a16="http://schemas.microsoft.com/office/drawing/2014/main" id="{4DB53281-A6F4-777C-673A-83CAC43B921B}"/>
               </a:ext>
             </a:extLst>
           </p:cNvPr>
@@ -696,7 +696,7 @@
           <p:cNvPr id="6" name="Slide Number Placeholder 5">
             <a:extLst>
               <a:ext uri="{FF2B5EF4-FFF2-40B4-BE49-F238E27FC236}">
-                <a16:creationId xmlns:a16="http://schemas.microsoft.com/office/drawing/2014/main" id="{0CA53153-040D-27ED-C2E4-E0CBF712C8D0}"/>
+                <a16:creationId xmlns:a16="http://schemas.microsoft.com/office/drawing/2014/main" id="{992E1896-FFE7-22AB-F487-6DF766939346}"/>
               </a:ext>
             </a:extLst>
           </p:cNvPr>
@@ -712,7 +712,7 @@
           <a:bodyPr/>
           <a:lstStyle/>
           <a:p>
-            <a:fld id="{7189187B-99F4-4735-ABB4-FE66A9D55044}" type="slidenum">
+            <a:fld id="{B314AA40-287F-4044-9DA8-666BB2934E1F}" type="slidenum">
               <a:rPr lang="en-US" smtClean="0"/>
               <a:t>‹#›</a:t>
             </a:fld>
@@ -723,7 +723,7 @@
     </p:spTree>
     <p:extLst>
       <p:ext uri="{BB962C8B-B14F-4D97-AF65-F5344CB8AC3E}">
-        <p14:creationId xmlns:p14="http://schemas.microsoft.com/office/powerpoint/2010/main" val="1292239271"/>
+        <p14:creationId xmlns:p14="http://schemas.microsoft.com/office/powerpoint/2010/main" val="3240309645"/>
       </p:ext>
     </p:extLst>
   </p:cSld>
@@ -755,7 +755,7 @@
           <p:cNvPr id="2" name="Title 1">
             <a:extLst>
               <a:ext uri="{FF2B5EF4-FFF2-40B4-BE49-F238E27FC236}">
-                <a16:creationId xmlns:a16="http://schemas.microsoft.com/office/drawing/2014/main" id="{48D7691A-6A71-D007-5E39-9687DBE5EBED}"/>
+                <a16:creationId xmlns:a16="http://schemas.microsoft.com/office/drawing/2014/main" id="{538545D9-C5AC-45F4-8FF6-6E8BDB591ABA}"/>
               </a:ext>
             </a:extLst>
           </p:cNvPr>
@@ -783,7 +783,7 @@
           <p:cNvPr id="3" name="Content Placeholder 2">
             <a:extLst>
               <a:ext uri="{FF2B5EF4-FFF2-40B4-BE49-F238E27FC236}">
-                <a16:creationId xmlns:a16="http://schemas.microsoft.com/office/drawing/2014/main" id="{64E31534-A758-375C-07A9-B98E128F6678}"/>
+                <a16:creationId xmlns:a16="http://schemas.microsoft.com/office/drawing/2014/main" id="{6D357522-A2A9-EC5A-0C17-DC032984998A}"/>
               </a:ext>
             </a:extLst>
           </p:cNvPr>
@@ -840,7 +840,7 @@
           <p:cNvPr id="4" name="Date Placeholder 3">
             <a:extLst>
               <a:ext uri="{FF2B5EF4-FFF2-40B4-BE49-F238E27FC236}">
-                <a16:creationId xmlns:a16="http://schemas.microsoft.com/office/drawing/2014/main" id="{D7F70F60-485E-0DE4-1448-ED0A1B2C37EE}"/>
+                <a16:creationId xmlns:a16="http://schemas.microsoft.com/office/drawing/2014/main" id="{9ACBAB5C-4EA4-E65A-4862-CF3DC6B44DEF}"/>
               </a:ext>
             </a:extLst>
           </p:cNvPr>
@@ -856,9 +856,9 @@
           <a:bodyPr/>
           <a:lstStyle/>
           <a:p>
-            <a:fld id="{9EA719E9-E1C7-4088-B20A-F699BC12EC34}" type="datetimeFigureOut">
+            <a:fld id="{A0A566AB-29BE-4B7F-AC17-D3FD8657D75D}" type="datetimeFigureOut">
               <a:rPr lang="en-US" smtClean="0"/>
-              <a:t>6/25/2026</a:t>
+              <a:t>6/26/2026</a:t>
             </a:fld>
             <a:endParaRPr lang="en-US"/>
           </a:p>
@@ -869,7 +869,7 @@
           <p:cNvPr id="5" name="Footer Placeholder 4">
             <a:extLst>
               <a:ext uri="{FF2B5EF4-FFF2-40B4-BE49-F238E27FC236}">
-                <a16:creationId xmlns:a16="http://schemas.microsoft.com/office/drawing/2014/main" id="{0612D660-1B61-93B9-0505-067E7B267A7E}"/>
+                <a16:creationId xmlns:a16="http://schemas.microsoft.com/office/drawing/2014/main" id="{7CEB3CD5-3AEE-748A-4131-E4EC2033F81C}"/>
               </a:ext>
             </a:extLst>
           </p:cNvPr>
@@ -894,7 +894,7 @@
           <p:cNvPr id="6" name="Slide Number Placeholder 5">
             <a:extLst>
               <a:ext uri="{FF2B5EF4-FFF2-40B4-BE49-F238E27FC236}">
-                <a16:creationId xmlns:a16="http://schemas.microsoft.com/office/drawing/2014/main" id="{D37B2844-9EC8-CAD4-F733-DF39C1375854}"/>
+                <a16:creationId xmlns:a16="http://schemas.microsoft.com/office/drawing/2014/main" id="{8D70A0EA-25F0-1AE1-870F-BFEA9E80058E}"/>
               </a:ext>
             </a:extLst>
           </p:cNvPr>
@@ -910,7 +910,7 @@
           <a:bodyPr/>
           <a:lstStyle/>
           <a:p>
-            <a:fld id="{7189187B-99F4-4735-ABB4-FE66A9D55044}" type="slidenum">
+            <a:fld id="{B314AA40-287F-4044-9DA8-666BB2934E1F}" type="slidenum">
               <a:rPr lang="en-US" smtClean="0"/>
               <a:t>‹#›</a:t>
             </a:fld>
@@ -921,7 +921,7 @@
     </p:spTree>
     <p:extLst>
       <p:ext uri="{BB962C8B-B14F-4D97-AF65-F5344CB8AC3E}">
-        <p14:creationId xmlns:p14="http://schemas.microsoft.com/office/powerpoint/2010/main" val="3462802666"/>
+        <p14:creationId xmlns:p14="http://schemas.microsoft.com/office/powerpoint/2010/main" val="3140352713"/>
       </p:ext>
     </p:extLst>
   </p:cSld>
@@ -953,7 +953,7 @@
           <p:cNvPr id="2" name="Title 1">
             <a:extLst>
               <a:ext uri="{FF2B5EF4-FFF2-40B4-BE49-F238E27FC236}">
-                <a16:creationId xmlns:a16="http://schemas.microsoft.com/office/drawing/2014/main" id="{00B84791-7611-482F-F00B-5C82AF75C7B3}"/>
+                <a16:creationId xmlns:a16="http://schemas.microsoft.com/office/drawing/2014/main" id="{8ACD79D6-BD13-75CB-86EA-E05F1F379B55}"/>
               </a:ext>
             </a:extLst>
           </p:cNvPr>
@@ -990,7 +990,7 @@
           <p:cNvPr id="3" name="Text Placeholder 2">
             <a:extLst>
               <a:ext uri="{FF2B5EF4-FFF2-40B4-BE49-F238E27FC236}">
-                <a16:creationId xmlns:a16="http://schemas.microsoft.com/office/drawing/2014/main" id="{E827FEF5-38C0-6EF3-3215-7E509826CF57}"/>
+                <a16:creationId xmlns:a16="http://schemas.microsoft.com/office/drawing/2014/main" id="{90CFD8B2-3906-92BA-2B8C-DB3D5772502A}"/>
               </a:ext>
             </a:extLst>
           </p:cNvPr>
@@ -1115,7 +1115,7 @@
           <p:cNvPr id="4" name="Date Placeholder 3">
             <a:extLst>
               <a:ext uri="{FF2B5EF4-FFF2-40B4-BE49-F238E27FC236}">
-                <a16:creationId xmlns:a16="http://schemas.microsoft.com/office/drawing/2014/main" id="{A4D40594-8120-8152-39A0-BCA9B97E3AE1}"/>
+                <a16:creationId xmlns:a16="http://schemas.microsoft.com/office/drawing/2014/main" id="{264D052F-E571-9015-E486-5F10A0484B1F}"/>
               </a:ext>
             </a:extLst>
           </p:cNvPr>
@@ -1131,9 +1131,9 @@
           <a:bodyPr/>
           <a:lstStyle/>
           <a:p>
-            <a:fld id="{9EA719E9-E1C7-4088-B20A-F699BC12EC34}" type="datetimeFigureOut">
+            <a:fld id="{A0A566AB-29BE-4B7F-AC17-D3FD8657D75D}" type="datetimeFigureOut">
               <a:rPr lang="en-US" smtClean="0"/>
-              <a:t>6/25/2026</a:t>
+              <a:t>6/26/2026</a:t>
             </a:fld>
             <a:endParaRPr lang="en-US"/>
           </a:p>
@@ -1144,7 +1144,7 @@
           <p:cNvPr id="5" name="Footer Placeholder 4">
             <a:extLst>
               <a:ext uri="{FF2B5EF4-FFF2-40B4-BE49-F238E27FC236}">
-                <a16:creationId xmlns:a16="http://schemas.microsoft.com/office/drawing/2014/main" id="{BA974762-F750-CF48-A27C-D555FF335DB4}"/>
+                <a16:creationId xmlns:a16="http://schemas.microsoft.com/office/drawing/2014/main" id="{92626D68-B01A-3125-EADE-51C4FAC9CA5D}"/>
               </a:ext>
             </a:extLst>
           </p:cNvPr>
@@ -1169,7 +1169,7 @@
           <p:cNvPr id="6" name="Slide Number Placeholder 5">
             <a:extLst>
               <a:ext uri="{FF2B5EF4-FFF2-40B4-BE49-F238E27FC236}">
-                <a16:creationId xmlns:a16="http://schemas.microsoft.com/office/drawing/2014/main" id="{5F71CB32-D44D-0654-A367-C20D8E4B77C3}"/>
+                <a16:creationId xmlns:a16="http://schemas.microsoft.com/office/drawing/2014/main" id="{E55E9C77-B503-2611-91C1-EC8011537756}"/>
               </a:ext>
             </a:extLst>
           </p:cNvPr>
@@ -1185,7 +1185,7 @@
           <a:bodyPr/>
           <a:lstStyle/>
           <a:p>
-            <a:fld id="{7189187B-99F4-4735-ABB4-FE66A9D55044}" type="slidenum">
+            <a:fld id="{B314AA40-287F-4044-9DA8-666BB2934E1F}" type="slidenum">
               <a:rPr lang="en-US" smtClean="0"/>
               <a:t>‹#›</a:t>
             </a:fld>
@@ -1196,7 +1196,7 @@
     </p:spTree>
     <p:extLst>
       <p:ext uri="{BB962C8B-B14F-4D97-AF65-F5344CB8AC3E}">
-        <p14:creationId xmlns:p14="http://schemas.microsoft.com/office/powerpoint/2010/main" val="2607181422"/>
+        <p14:creationId xmlns:p14="http://schemas.microsoft.com/office/powerpoint/2010/main" val="3644685832"/>
       </p:ext>
     </p:extLst>
   </p:cSld>
@@ -1228,7 +1228,7 @@
           <p:cNvPr id="2" name="Title 1">
             <a:extLst>
               <a:ext uri="{FF2B5EF4-FFF2-40B4-BE49-F238E27FC236}">
-                <a16:creationId xmlns:a16="http://schemas.microsoft.com/office/drawing/2014/main" id="{60788E9A-C2F0-9FCB-0206-939E83F1DFC0}"/>
+                <a16:creationId xmlns:a16="http://schemas.microsoft.com/office/drawing/2014/main" id="{A6A4D6A9-954E-DF31-D2B9-3430BCF5B6DE}"/>
               </a:ext>
             </a:extLst>
           </p:cNvPr>
@@ -1256,7 +1256,7 @@
           <p:cNvPr id="3" name="Content Placeholder 2">
             <a:extLst>
               <a:ext uri="{FF2B5EF4-FFF2-40B4-BE49-F238E27FC236}">
-                <a16:creationId xmlns:a16="http://schemas.microsoft.com/office/drawing/2014/main" id="{115E3D49-1617-46B6-EFAC-156B0117B5A3}"/>
+                <a16:creationId xmlns:a16="http://schemas.microsoft.com/office/drawing/2014/main" id="{49F82FF6-F1B2-B24B-BD59-7D631F63EB49}"/>
               </a:ext>
             </a:extLst>
           </p:cNvPr>
@@ -1318,7 +1318,7 @@
           <p:cNvPr id="4" name="Content Placeholder 3">
             <a:extLst>
               <a:ext uri="{FF2B5EF4-FFF2-40B4-BE49-F238E27FC236}">
-                <a16:creationId xmlns:a16="http://schemas.microsoft.com/office/drawing/2014/main" id="{DA4A7B39-F035-4A06-2AA5-A37B91DD3AC4}"/>
+                <a16:creationId xmlns:a16="http://schemas.microsoft.com/office/drawing/2014/main" id="{6800CC73-A440-1538-B122-A92C68032CB1}"/>
               </a:ext>
             </a:extLst>
           </p:cNvPr>
@@ -1380,7 +1380,7 @@
           <p:cNvPr id="5" name="Date Placeholder 4">
             <a:extLst>
               <a:ext uri="{FF2B5EF4-FFF2-40B4-BE49-F238E27FC236}">
-                <a16:creationId xmlns:a16="http://schemas.microsoft.com/office/drawing/2014/main" id="{571F595A-2BD1-D7A2-36B6-2EB1D324FA0E}"/>
+                <a16:creationId xmlns:a16="http://schemas.microsoft.com/office/drawing/2014/main" id="{C505D21B-6E09-C192-A20C-55A03CB40300}"/>
               </a:ext>
             </a:extLst>
           </p:cNvPr>
@@ -1396,9 +1396,9 @@
           <a:bodyPr/>
           <a:lstStyle/>
           <a:p>
-            <a:fld id="{9EA719E9-E1C7-4088-B20A-F699BC12EC34}" type="datetimeFigureOut">
+            <a:fld id="{A0A566AB-29BE-4B7F-AC17-D3FD8657D75D}" type="datetimeFigureOut">
               <a:rPr lang="en-US" smtClean="0"/>
-              <a:t>6/25/2026</a:t>
+              <a:t>6/26/2026</a:t>
             </a:fld>
             <a:endParaRPr lang="en-US"/>
           </a:p>
@@ -1409,7 +1409,7 @@
           <p:cNvPr id="6" name="Footer Placeholder 5">
             <a:extLst>
               <a:ext uri="{FF2B5EF4-FFF2-40B4-BE49-F238E27FC236}">
-                <a16:creationId xmlns:a16="http://schemas.microsoft.com/office/drawing/2014/main" id="{95E3E892-741C-F88C-0AA7-8E9A2F0647E5}"/>
+                <a16:creationId xmlns:a16="http://schemas.microsoft.com/office/drawing/2014/main" id="{61ED4A61-94A1-C5AE-6075-7F14971968BF}"/>
               </a:ext>
             </a:extLst>
           </p:cNvPr>
@@ -1434,7 +1434,7 @@
           <p:cNvPr id="7" name="Slide Number Placeholder 6">
             <a:extLst>
               <a:ext uri="{FF2B5EF4-FFF2-40B4-BE49-F238E27FC236}">
-                <a16:creationId xmlns:a16="http://schemas.microsoft.com/office/drawing/2014/main" id="{DC318401-4E16-657A-B7D4-4542798C250D}"/>
+                <a16:creationId xmlns:a16="http://schemas.microsoft.com/office/drawing/2014/main" id="{5EADC3FE-1E40-F02C-E687-C6A16F8EB9CF}"/>
               </a:ext>
             </a:extLst>
           </p:cNvPr>
@@ -1450,7 +1450,7 @@
           <a:bodyPr/>
           <a:lstStyle/>
           <a:p>
-            <a:fld id="{7189187B-99F4-4735-ABB4-FE66A9D55044}" type="slidenum">
+            <a:fld id="{B314AA40-287F-4044-9DA8-666BB2934E1F}" type="slidenum">
               <a:rPr lang="en-US" smtClean="0"/>
               <a:t>‹#›</a:t>
             </a:fld>
@@ -1461,7 +1461,7 @@
     </p:spTree>
     <p:extLst>
       <p:ext uri="{BB962C8B-B14F-4D97-AF65-F5344CB8AC3E}">
-        <p14:creationId xmlns:p14="http://schemas.microsoft.com/office/powerpoint/2010/main" val="984489619"/>
+        <p14:creationId xmlns:p14="http://schemas.microsoft.com/office/powerpoint/2010/main" val="1543084316"/>
       </p:ext>
     </p:extLst>
   </p:cSld>
@@ -1493,7 +1493,7 @@
           <p:cNvPr id="2" name="Title 1">
             <a:extLst>
               <a:ext uri="{FF2B5EF4-FFF2-40B4-BE49-F238E27FC236}">
-                <a16:creationId xmlns:a16="http://schemas.microsoft.com/office/drawing/2014/main" id="{8B626F73-3AD8-1703-EA55-9FF042A88E9F}"/>
+                <a16:creationId xmlns:a16="http://schemas.microsoft.com/office/drawing/2014/main" id="{D22A410B-8AC4-6F9E-5B82-699FC6DC432A}"/>
               </a:ext>
             </a:extLst>
           </p:cNvPr>
@@ -1526,7 +1526,7 @@
           <p:cNvPr id="3" name="Text Placeholder 2">
             <a:extLst>
               <a:ext uri="{FF2B5EF4-FFF2-40B4-BE49-F238E27FC236}">
-                <a16:creationId xmlns:a16="http://schemas.microsoft.com/office/drawing/2014/main" id="{DDB2AEC6-5D31-3D0B-2523-542B78899065}"/>
+                <a16:creationId xmlns:a16="http://schemas.microsoft.com/office/drawing/2014/main" id="{9E1F7532-083B-9678-1183-E7B12C7A9B41}"/>
               </a:ext>
             </a:extLst>
           </p:cNvPr>
@@ -1597,7 +1597,7 @@
           <p:cNvPr id="4" name="Content Placeholder 3">
             <a:extLst>
               <a:ext uri="{FF2B5EF4-FFF2-40B4-BE49-F238E27FC236}">
-                <a16:creationId xmlns:a16="http://schemas.microsoft.com/office/drawing/2014/main" id="{4971F4F5-E930-B78B-03BB-E7DC16ED3A04}"/>
+                <a16:creationId xmlns:a16="http://schemas.microsoft.com/office/drawing/2014/main" id="{250E68E4-337B-0EF9-929A-B141746214FF}"/>
               </a:ext>
             </a:extLst>
           </p:cNvPr>
@@ -1659,7 +1659,7 @@
           <p:cNvPr id="5" name="Text Placeholder 4">
             <a:extLst>
               <a:ext uri="{FF2B5EF4-FFF2-40B4-BE49-F238E27FC236}">
-                <a16:creationId xmlns:a16="http://schemas.microsoft.com/office/drawing/2014/main" id="{E5B0A1D0-2CE2-09CD-C3C7-F47D1F0B8FFD}"/>
+                <a16:creationId xmlns:a16="http://schemas.microsoft.com/office/drawing/2014/main" id="{FDF333C9-3A0C-88B8-3975-4579CFE9D0AC}"/>
               </a:ext>
             </a:extLst>
           </p:cNvPr>
@@ -1730,7 +1730,7 @@
           <p:cNvPr id="6" name="Content Placeholder 5">
             <a:extLst>
               <a:ext uri="{FF2B5EF4-FFF2-40B4-BE49-F238E27FC236}">
-                <a16:creationId xmlns:a16="http://schemas.microsoft.com/office/drawing/2014/main" id="{01A0FAE3-A43C-F2B2-9CD1-8CF3D254C759}"/>
+                <a16:creationId xmlns:a16="http://schemas.microsoft.com/office/drawing/2014/main" id="{ED13E8E0-EBEC-F1C9-D384-63D9AE03068B}"/>
               </a:ext>
             </a:extLst>
           </p:cNvPr>
@@ -1792,7 +1792,7 @@
           <p:cNvPr id="7" name="Date Placeholder 6">
             <a:extLst>
               <a:ext uri="{FF2B5EF4-FFF2-40B4-BE49-F238E27FC236}">
-                <a16:creationId xmlns:a16="http://schemas.microsoft.com/office/drawing/2014/main" id="{05730BEF-83A0-9B19-8DAE-F7A622301247}"/>
+                <a16:creationId xmlns:a16="http://schemas.microsoft.com/office/drawing/2014/main" id="{2CEB31AB-187E-4C9D-349A-7FB22BD0FE71}"/>
               </a:ext>
             </a:extLst>
           </p:cNvPr>
@@ -1808,9 +1808,9 @@
           <a:bodyPr/>
           <a:lstStyle/>
           <a:p>
-            <a:fld id="{9EA719E9-E1C7-4088-B20A-F699BC12EC34}" type="datetimeFigureOut">
+            <a:fld id="{A0A566AB-29BE-4B7F-AC17-D3FD8657D75D}" type="datetimeFigureOut">
               <a:rPr lang="en-US" smtClean="0"/>
-              <a:t>6/25/2026</a:t>
+              <a:t>6/26/2026</a:t>
             </a:fld>
             <a:endParaRPr lang="en-US"/>
           </a:p>
@@ -1821,7 +1821,7 @@
           <p:cNvPr id="8" name="Footer Placeholder 7">
             <a:extLst>
               <a:ext uri="{FF2B5EF4-FFF2-40B4-BE49-F238E27FC236}">
-                <a16:creationId xmlns:a16="http://schemas.microsoft.com/office/drawing/2014/main" id="{5F199B2A-B624-2887-DA5E-D1EB1EB212AE}"/>
+                <a16:creationId xmlns:a16="http://schemas.microsoft.com/office/drawing/2014/main" id="{2ED9632C-3190-80D1-FFE8-A461DEF851E5}"/>
               </a:ext>
             </a:extLst>
           </p:cNvPr>
@@ -1846,7 +1846,7 @@
           <p:cNvPr id="9" name="Slide Number Placeholder 8">
             <a:extLst>
               <a:ext uri="{FF2B5EF4-FFF2-40B4-BE49-F238E27FC236}">
-                <a16:creationId xmlns:a16="http://schemas.microsoft.com/office/drawing/2014/main" id="{58C3308E-D361-F987-7202-0C4086E8B0EE}"/>
+                <a16:creationId xmlns:a16="http://schemas.microsoft.com/office/drawing/2014/main" id="{DF102FA1-4841-B430-3189-4CEE6B76F788}"/>
               </a:ext>
             </a:extLst>
           </p:cNvPr>
@@ -1862,7 +1862,7 @@
           <a:bodyPr/>
           <a:lstStyle/>
           <a:p>
-            <a:fld id="{7189187B-99F4-4735-ABB4-FE66A9D55044}" type="slidenum">
+            <a:fld id="{B314AA40-287F-4044-9DA8-666BB2934E1F}" type="slidenum">
               <a:rPr lang="en-US" smtClean="0"/>
               <a:t>‹#›</a:t>
             </a:fld>
@@ -1873,7 +1873,7 @@
     </p:spTree>
     <p:extLst>
       <p:ext uri="{BB962C8B-B14F-4D97-AF65-F5344CB8AC3E}">
-        <p14:creationId xmlns:p14="http://schemas.microsoft.com/office/powerpoint/2010/main" val="3120062895"/>
+        <p14:creationId xmlns:p14="http://schemas.microsoft.com/office/powerpoint/2010/main" val="2369905068"/>
       </p:ext>
     </p:extLst>
   </p:cSld>
@@ -1905,7 +1905,7 @@
           <p:cNvPr id="2" name="Title 1">
             <a:extLst>
               <a:ext uri="{FF2B5EF4-FFF2-40B4-BE49-F238E27FC236}">
-                <a16:creationId xmlns:a16="http://schemas.microsoft.com/office/drawing/2014/main" id="{B2B94F94-C20F-651D-057E-7E5EB78A0E5D}"/>
+                <a16:creationId xmlns:a16="http://schemas.microsoft.com/office/drawing/2014/main" id="{9DFC640C-AC2C-7DF7-ABCD-621F34F4340A}"/>
               </a:ext>
             </a:extLst>
           </p:cNvPr>
@@ -1933,7 +1933,7 @@
           <p:cNvPr id="3" name="Date Placeholder 2">
             <a:extLst>
               <a:ext uri="{FF2B5EF4-FFF2-40B4-BE49-F238E27FC236}">
-                <a16:creationId xmlns:a16="http://schemas.microsoft.com/office/drawing/2014/main" id="{E8260E5E-A313-F673-037A-49BAE5320198}"/>
+                <a16:creationId xmlns:a16="http://schemas.microsoft.com/office/drawing/2014/main" id="{FEF76307-A26E-8205-89F7-9D3B2885BC56}"/>
               </a:ext>
             </a:extLst>
           </p:cNvPr>
@@ -1949,9 +1949,9 @@
           <a:bodyPr/>
           <a:lstStyle/>
           <a:p>
-            <a:fld id="{9EA719E9-E1C7-4088-B20A-F699BC12EC34}" type="datetimeFigureOut">
+            <a:fld id="{A0A566AB-29BE-4B7F-AC17-D3FD8657D75D}" type="datetimeFigureOut">
               <a:rPr lang="en-US" smtClean="0"/>
-              <a:t>6/25/2026</a:t>
+              <a:t>6/26/2026</a:t>
             </a:fld>
             <a:endParaRPr lang="en-US"/>
           </a:p>
@@ -1962,7 +1962,7 @@
           <p:cNvPr id="4" name="Footer Placeholder 3">
             <a:extLst>
               <a:ext uri="{FF2B5EF4-FFF2-40B4-BE49-F238E27FC236}">
-                <a16:creationId xmlns:a16="http://schemas.microsoft.com/office/drawing/2014/main" id="{13D633C5-13F9-A4A8-023C-1C6F669076E5}"/>
+                <a16:creationId xmlns:a16="http://schemas.microsoft.com/office/drawing/2014/main" id="{94C4F226-D38E-B383-B8B6-D6224E5B53C2}"/>
               </a:ext>
             </a:extLst>
           </p:cNvPr>
@@ -1987,7 +1987,7 @@
           <p:cNvPr id="5" name="Slide Number Placeholder 4">
             <a:extLst>
               <a:ext uri="{FF2B5EF4-FFF2-40B4-BE49-F238E27FC236}">
-                <a16:creationId xmlns:a16="http://schemas.microsoft.com/office/drawing/2014/main" id="{3533EA0B-4032-B2F7-74C9-D64C3A63436B}"/>
+                <a16:creationId xmlns:a16="http://schemas.microsoft.com/office/drawing/2014/main" id="{7A1A14EF-A327-84A6-6BEA-326110E1937F}"/>
               </a:ext>
             </a:extLst>
           </p:cNvPr>
@@ -2003,7 +2003,7 @@
           <a:bodyPr/>
           <a:lstStyle/>
           <a:p>
-            <a:fld id="{7189187B-99F4-4735-ABB4-FE66A9D55044}" type="slidenum">
+            <a:fld id="{B314AA40-287F-4044-9DA8-666BB2934E1F}" type="slidenum">
               <a:rPr lang="en-US" smtClean="0"/>
               <a:t>‹#›</a:t>
             </a:fld>
@@ -2014,7 +2014,7 @@
     </p:spTree>
     <p:extLst>
       <p:ext uri="{BB962C8B-B14F-4D97-AF65-F5344CB8AC3E}">
-        <p14:creationId xmlns:p14="http://schemas.microsoft.com/office/powerpoint/2010/main" val="2773315420"/>
+        <p14:creationId xmlns:p14="http://schemas.microsoft.com/office/powerpoint/2010/main" val="2349665209"/>
       </p:ext>
     </p:extLst>
   </p:cSld>
@@ -2046,7 +2046,7 @@
           <p:cNvPr id="2" name="Date Placeholder 1">
             <a:extLst>
               <a:ext uri="{FF2B5EF4-FFF2-40B4-BE49-F238E27FC236}">
-                <a16:creationId xmlns:a16="http://schemas.microsoft.com/office/drawing/2014/main" id="{4D918616-F9EF-E694-95DC-FC24637EBE2E}"/>
+                <a16:creationId xmlns:a16="http://schemas.microsoft.com/office/drawing/2014/main" id="{2C117BE5-97B2-4FB8-B975-6BE4AEC9C0E4}"/>
               </a:ext>
             </a:extLst>
           </p:cNvPr>
@@ -2062,9 +2062,9 @@
           <a:bodyPr/>
           <a:lstStyle/>
           <a:p>
-            <a:fld id="{9EA719E9-E1C7-4088-B20A-F699BC12EC34}" type="datetimeFigureOut">
+            <a:fld id="{A0A566AB-29BE-4B7F-AC17-D3FD8657D75D}" type="datetimeFigureOut">
               <a:rPr lang="en-US" smtClean="0"/>
-              <a:t>6/25/2026</a:t>
+              <a:t>6/26/2026</a:t>
             </a:fld>
             <a:endParaRPr lang="en-US"/>
           </a:p>
@@ -2075,7 +2075,7 @@
           <p:cNvPr id="3" name="Footer Placeholder 2">
             <a:extLst>
               <a:ext uri="{FF2B5EF4-FFF2-40B4-BE49-F238E27FC236}">
-                <a16:creationId xmlns:a16="http://schemas.microsoft.com/office/drawing/2014/main" id="{794FAAE0-59FC-5BB9-4FE5-90B0B475437D}"/>
+                <a16:creationId xmlns:a16="http://schemas.microsoft.com/office/drawing/2014/main" id="{E85D7F25-3F82-95C7-D238-2F955F2C3C21}"/>
               </a:ext>
             </a:extLst>
           </p:cNvPr>
@@ -2100,7 +2100,7 @@
           <p:cNvPr id="4" name="Slide Number Placeholder 3">
             <a:extLst>
               <a:ext uri="{FF2B5EF4-FFF2-40B4-BE49-F238E27FC236}">
-                <a16:creationId xmlns:a16="http://schemas.microsoft.com/office/drawing/2014/main" id="{3076CD70-CD8F-3988-5DFB-B7CE4EE045DA}"/>
+                <a16:creationId xmlns:a16="http://schemas.microsoft.com/office/drawing/2014/main" id="{5E5D0D35-2AE2-CF2A-73CC-CE806D04D7FE}"/>
               </a:ext>
             </a:extLst>
           </p:cNvPr>
@@ -2116,7 +2116,7 @@
           <a:bodyPr/>
           <a:lstStyle/>
           <a:p>
-            <a:fld id="{7189187B-99F4-4735-ABB4-FE66A9D55044}" type="slidenum">
+            <a:fld id="{B314AA40-287F-4044-9DA8-666BB2934E1F}" type="slidenum">
               <a:rPr lang="en-US" smtClean="0"/>
               <a:t>‹#›</a:t>
             </a:fld>
@@ -2127,7 +2127,7 @@
     </p:spTree>
     <p:extLst>
       <p:ext uri="{BB962C8B-B14F-4D97-AF65-F5344CB8AC3E}">
-        <p14:creationId xmlns:p14="http://schemas.microsoft.com/office/powerpoint/2010/main" val="3801195954"/>
+        <p14:creationId xmlns:p14="http://schemas.microsoft.com/office/powerpoint/2010/main" val="1515862941"/>
       </p:ext>
     </p:extLst>
   </p:cSld>
@@ -2159,7 +2159,7 @@
           <p:cNvPr id="2" name="Title 1">
             <a:extLst>
               <a:ext uri="{FF2B5EF4-FFF2-40B4-BE49-F238E27FC236}">
-                <a16:creationId xmlns:a16="http://schemas.microsoft.com/office/drawing/2014/main" id="{905BBBED-A5F5-2C4D-B57C-8154504D0D5D}"/>
+                <a16:creationId xmlns:a16="http://schemas.microsoft.com/office/drawing/2014/main" id="{E804B58C-3F48-AFCC-B7E0-B78F007EC593}"/>
               </a:ext>
             </a:extLst>
           </p:cNvPr>
@@ -2196,7 +2196,7 @@
           <p:cNvPr id="3" name="Content Placeholder 2">
             <a:extLst>
               <a:ext uri="{FF2B5EF4-FFF2-40B4-BE49-F238E27FC236}">
-                <a16:creationId xmlns:a16="http://schemas.microsoft.com/office/drawing/2014/main" id="{9E4F2A2E-D591-CFCF-A9AE-21770EA1F147}"/>
+                <a16:creationId xmlns:a16="http://schemas.microsoft.com/office/drawing/2014/main" id="{2A5B9D80-481F-9BC0-1B51-82BD6F50F5D2}"/>
               </a:ext>
             </a:extLst>
           </p:cNvPr>
@@ -2286,7 +2286,7 @@
           <p:cNvPr id="4" name="Text Placeholder 3">
             <a:extLst>
               <a:ext uri="{FF2B5EF4-FFF2-40B4-BE49-F238E27FC236}">
-                <a16:creationId xmlns:a16="http://schemas.microsoft.com/office/drawing/2014/main" id="{42E8B549-7E47-E14A-33D5-BCB073F77D64}"/>
+                <a16:creationId xmlns:a16="http://schemas.microsoft.com/office/drawing/2014/main" id="{A7DEDDDE-9B73-A61B-62EF-B412530C9BCA}"/>
               </a:ext>
             </a:extLst>
           </p:cNvPr>
@@ -2357,7 +2357,7 @@
           <p:cNvPr id="5" name="Date Placeholder 4">
             <a:extLst>
               <a:ext uri="{FF2B5EF4-FFF2-40B4-BE49-F238E27FC236}">
-                <a16:creationId xmlns:a16="http://schemas.microsoft.com/office/drawing/2014/main" id="{64051601-AA87-561B-A203-3970061C85BF}"/>
+                <a16:creationId xmlns:a16="http://schemas.microsoft.com/office/drawing/2014/main" id="{0DB1F524-4124-6D92-B7E0-9CCFB4884A53}"/>
               </a:ext>
             </a:extLst>
           </p:cNvPr>
@@ -2373,9 +2373,9 @@
           <a:bodyPr/>
           <a:lstStyle/>
           <a:p>
-            <a:fld id="{9EA719E9-E1C7-4088-B20A-F699BC12EC34}" type="datetimeFigureOut">
+            <a:fld id="{A0A566AB-29BE-4B7F-AC17-D3FD8657D75D}" type="datetimeFigureOut">
               <a:rPr lang="en-US" smtClean="0"/>
-              <a:t>6/25/2026</a:t>
+              <a:t>6/26/2026</a:t>
             </a:fld>
             <a:endParaRPr lang="en-US"/>
           </a:p>
@@ -2386,7 +2386,7 @@
           <p:cNvPr id="6" name="Footer Placeholder 5">
             <a:extLst>
               <a:ext uri="{FF2B5EF4-FFF2-40B4-BE49-F238E27FC236}">
-                <a16:creationId xmlns:a16="http://schemas.microsoft.com/office/drawing/2014/main" id="{587D81CC-45A0-EFED-F778-5F143E7D1182}"/>
+                <a16:creationId xmlns:a16="http://schemas.microsoft.com/office/drawing/2014/main" id="{7F92D71B-64BD-CE7B-53C1-852741DD724C}"/>
               </a:ext>
             </a:extLst>
           </p:cNvPr>
@@ -2411,7 +2411,7 @@
           <p:cNvPr id="7" name="Slide Number Placeholder 6">
             <a:extLst>
               <a:ext uri="{FF2B5EF4-FFF2-40B4-BE49-F238E27FC236}">
-                <a16:creationId xmlns:a16="http://schemas.microsoft.com/office/drawing/2014/main" id="{DB1F4D8A-ADF0-9A32-6A6B-4280D3662319}"/>
+                <a16:creationId xmlns:a16="http://schemas.microsoft.com/office/drawing/2014/main" id="{D76A575E-266F-DA56-4125-2877BDC745EA}"/>
               </a:ext>
             </a:extLst>
           </p:cNvPr>
@@ -2427,7 +2427,7 @@
           <a:bodyPr/>
           <a:lstStyle/>
           <a:p>
-            <a:fld id="{7189187B-99F4-4735-ABB4-FE66A9D55044}" type="slidenum">
+            <a:fld id="{B314AA40-287F-4044-9DA8-666BB2934E1F}" type="slidenum">
               <a:rPr lang="en-US" smtClean="0"/>
               <a:t>‹#›</a:t>
             </a:fld>
@@ -2438,7 +2438,7 @@
     </p:spTree>
     <p:extLst>
       <p:ext uri="{BB962C8B-B14F-4D97-AF65-F5344CB8AC3E}">
-        <p14:creationId xmlns:p14="http://schemas.microsoft.com/office/powerpoint/2010/main" val="2641063607"/>
+        <p14:creationId xmlns:p14="http://schemas.microsoft.com/office/powerpoint/2010/main" val="2963582613"/>
       </p:ext>
     </p:extLst>
   </p:cSld>
@@ -2470,7 +2470,7 @@
           <p:cNvPr id="2" name="Title 1">
             <a:extLst>
               <a:ext uri="{FF2B5EF4-FFF2-40B4-BE49-F238E27FC236}">
-                <a16:creationId xmlns:a16="http://schemas.microsoft.com/office/drawing/2014/main" id="{4DEDCC64-8079-ED3C-22A7-E5E0817984C0}"/>
+                <a16:creationId xmlns:a16="http://schemas.microsoft.com/office/drawing/2014/main" id="{18310C43-4EE8-BF73-9860-03FCF14C89C2}"/>
               </a:ext>
             </a:extLst>
           </p:cNvPr>
@@ -2507,7 +2507,7 @@
           <p:cNvPr id="3" name="Picture Placeholder 2">
             <a:extLst>
               <a:ext uri="{FF2B5EF4-FFF2-40B4-BE49-F238E27FC236}">
-                <a16:creationId xmlns:a16="http://schemas.microsoft.com/office/drawing/2014/main" id="{7E98BCC5-D742-05B3-FF3C-0F96079A080A}"/>
+                <a16:creationId xmlns:a16="http://schemas.microsoft.com/office/drawing/2014/main" id="{4E7F9EE4-C5F6-5EF1-68A0-220625D1737B}"/>
               </a:ext>
             </a:extLst>
           </p:cNvPr>
@@ -2574,7 +2574,7 @@
           <p:cNvPr id="4" name="Text Placeholder 3">
             <a:extLst>
               <a:ext uri="{FF2B5EF4-FFF2-40B4-BE49-F238E27FC236}">
-                <a16:creationId xmlns:a16="http://schemas.microsoft.com/office/drawing/2014/main" id="{BB19143B-34B6-A43E-B313-BF9F76456396}"/>
+                <a16:creationId xmlns:a16="http://schemas.microsoft.com/office/drawing/2014/main" id="{FFA2C980-904E-ED17-89C4-9B49A241E3E3}"/>
               </a:ext>
             </a:extLst>
           </p:cNvPr>
@@ -2645,7 +2645,7 @@
           <p:cNvPr id="5" name="Date Placeholder 4">
             <a:extLst>
               <a:ext uri="{FF2B5EF4-FFF2-40B4-BE49-F238E27FC236}">
-                <a16:creationId xmlns:a16="http://schemas.microsoft.com/office/drawing/2014/main" id="{1B56CDB2-B74D-B6AA-7854-AC077EB19309}"/>
+                <a16:creationId xmlns:a16="http://schemas.microsoft.com/office/drawing/2014/main" id="{508E0FA1-4430-9D36-2F01-4C31A8EBF81C}"/>
               </a:ext>
             </a:extLst>
           </p:cNvPr>
@@ -2661,9 +2661,9 @@
           <a:bodyPr/>
           <a:lstStyle/>
           <a:p>
-            <a:fld id="{9EA719E9-E1C7-4088-B20A-F699BC12EC34}" type="datetimeFigureOut">
+            <a:fld id="{A0A566AB-29BE-4B7F-AC17-D3FD8657D75D}" type="datetimeFigureOut">
               <a:rPr lang="en-US" smtClean="0"/>
-              <a:t>6/25/2026</a:t>
+              <a:t>6/26/2026</a:t>
             </a:fld>
             <a:endParaRPr lang="en-US"/>
           </a:p>
@@ -2674,7 +2674,7 @@
           <p:cNvPr id="6" name="Footer Placeholder 5">
             <a:extLst>
               <a:ext uri="{FF2B5EF4-FFF2-40B4-BE49-F238E27FC236}">
-                <a16:creationId xmlns:a16="http://schemas.microsoft.com/office/drawing/2014/main" id="{D27C2332-8778-5319-89EB-8B62FBBA4EA8}"/>
+                <a16:creationId xmlns:a16="http://schemas.microsoft.com/office/drawing/2014/main" id="{A9C13E8F-3027-A588-E70A-D35ACA7CEA0F}"/>
               </a:ext>
             </a:extLst>
           </p:cNvPr>
@@ -2699,7 +2699,7 @@
           <p:cNvPr id="7" name="Slide Number Placeholder 6">
             <a:extLst>
               <a:ext uri="{FF2B5EF4-FFF2-40B4-BE49-F238E27FC236}">
-                <a16:creationId xmlns:a16="http://schemas.microsoft.com/office/drawing/2014/main" id="{EF0B0075-F565-A6AC-5B1C-79B231C4681C}"/>
+                <a16:creationId xmlns:a16="http://schemas.microsoft.com/office/drawing/2014/main" id="{C87F2893-5F10-3F38-F9A3-5BE303F8FF1C}"/>
               </a:ext>
             </a:extLst>
           </p:cNvPr>
@@ -2715,7 +2715,7 @@
           <a:bodyPr/>
           <a:lstStyle/>
           <a:p>
-            <a:fld id="{7189187B-99F4-4735-ABB4-FE66A9D55044}" type="slidenum">
+            <a:fld id="{B314AA40-287F-4044-9DA8-666BB2934E1F}" type="slidenum">
               <a:rPr lang="en-US" smtClean="0"/>
               <a:t>‹#›</a:t>
             </a:fld>
@@ -2726,7 +2726,7 @@
     </p:spTree>
     <p:extLst>
       <p:ext uri="{BB962C8B-B14F-4D97-AF65-F5344CB8AC3E}">
-        <p14:creationId xmlns:p14="http://schemas.microsoft.com/office/powerpoint/2010/main" val="2130529523"/>
+        <p14:creationId xmlns:p14="http://schemas.microsoft.com/office/powerpoint/2010/main" val="1081818255"/>
       </p:ext>
     </p:extLst>
   </p:cSld>
@@ -2763,7 +2763,7 @@
           <p:cNvPr id="2" name="Title Placeholder 1">
             <a:extLst>
               <a:ext uri="{FF2B5EF4-FFF2-40B4-BE49-F238E27FC236}">
-                <a16:creationId xmlns:a16="http://schemas.microsoft.com/office/drawing/2014/main" id="{F85D9565-23FD-200D-61BF-1F297335820F}"/>
+                <a16:creationId xmlns:a16="http://schemas.microsoft.com/office/drawing/2014/main" id="{4BC9334F-352F-2AFD-BD9E-67E32E1B0833}"/>
               </a:ext>
             </a:extLst>
           </p:cNvPr>
@@ -2801,7 +2801,7 @@
           <p:cNvPr id="3" name="Text Placeholder 2">
             <a:extLst>
               <a:ext uri="{FF2B5EF4-FFF2-40B4-BE49-F238E27FC236}">
-                <a16:creationId xmlns:a16="http://schemas.microsoft.com/office/drawing/2014/main" id="{37583980-9581-88F4-A5A9-BAB3062506AC}"/>
+                <a16:creationId xmlns:a16="http://schemas.microsoft.com/office/drawing/2014/main" id="{CA6734EC-8E85-F945-8327-77FDE2922A99}"/>
               </a:ext>
             </a:extLst>
           </p:cNvPr>
@@ -2868,7 +2868,7 @@
           <p:cNvPr id="4" name="Date Placeholder 3">
             <a:extLst>
               <a:ext uri="{FF2B5EF4-FFF2-40B4-BE49-F238E27FC236}">
-                <a16:creationId xmlns:a16="http://schemas.microsoft.com/office/drawing/2014/main" id="{46B48FC3-316C-86B9-89A4-D9A33541240A}"/>
+                <a16:creationId xmlns:a16="http://schemas.microsoft.com/office/drawing/2014/main" id="{7697080D-10A4-11BF-C62D-BD45309B0F7D}"/>
               </a:ext>
             </a:extLst>
           </p:cNvPr>
@@ -2902,9 +2902,9 @@
             </a:lvl1pPr>
           </a:lstStyle>
           <a:p>
-            <a:fld id="{9EA719E9-E1C7-4088-B20A-F699BC12EC34}" type="datetimeFigureOut">
+            <a:fld id="{A0A566AB-29BE-4B7F-AC17-D3FD8657D75D}" type="datetimeFigureOut">
               <a:rPr lang="en-US" smtClean="0"/>
-              <a:t>6/25/2026</a:t>
+              <a:t>6/26/2026</a:t>
             </a:fld>
             <a:endParaRPr lang="en-US"/>
           </a:p>
@@ -2915,7 +2915,7 @@
           <p:cNvPr id="5" name="Footer Placeholder 4">
             <a:extLst>
               <a:ext uri="{FF2B5EF4-FFF2-40B4-BE49-F238E27FC236}">
-                <a16:creationId xmlns:a16="http://schemas.microsoft.com/office/drawing/2014/main" id="{C6C415C9-2506-3A89-B674-48C9BCD910BE}"/>
+                <a16:creationId xmlns:a16="http://schemas.microsoft.com/office/drawing/2014/main" id="{2D42523E-D34A-28F8-7E39-F09010D3613D}"/>
               </a:ext>
             </a:extLst>
           </p:cNvPr>
@@ -2958,7 +2958,7 @@
           <p:cNvPr id="6" name="Slide Number Placeholder 5">
             <a:extLst>
               <a:ext uri="{FF2B5EF4-FFF2-40B4-BE49-F238E27FC236}">
-                <a16:creationId xmlns:a16="http://schemas.microsoft.com/office/drawing/2014/main" id="{149285F1-F0BC-C046-7F93-4B1DABA09E25}"/>
+                <a16:creationId xmlns:a16="http://schemas.microsoft.com/office/drawing/2014/main" id="{3B7D4E99-3019-5033-BD28-224489FEA8A7}"/>
               </a:ext>
             </a:extLst>
           </p:cNvPr>
@@ -2992,7 +2992,7 @@
             </a:lvl1pPr>
           </a:lstStyle>
           <a:p>
-            <a:fld id="{7189187B-99F4-4735-ABB4-FE66A9D55044}" type="slidenum">
+            <a:fld id="{B314AA40-287F-4044-9DA8-666BB2934E1F}" type="slidenum">
               <a:rPr lang="en-US" smtClean="0"/>
               <a:t>‹#›</a:t>
             </a:fld>
@@ -3003,7 +3003,7 @@
     </p:spTree>
     <p:extLst>
       <p:ext uri="{BB962C8B-B14F-4D97-AF65-F5344CB8AC3E}">
-        <p14:creationId xmlns:p14="http://schemas.microsoft.com/office/powerpoint/2010/main" val="3910722933"/>
+        <p14:creationId xmlns:p14="http://schemas.microsoft.com/office/powerpoint/2010/main" val="1194032383"/>
       </p:ext>
     </p:extLst>
   </p:cSld>
@@ -3326,7 +3326,7 @@
           <p:cNvPr id="3" name="TestPicture">
             <a:extLst>
               <a:ext uri="{FF2B5EF4-FFF2-40B4-BE49-F238E27FC236}">
-                <a16:creationId xmlns:a16="http://schemas.microsoft.com/office/drawing/2014/main" id="{AF5345A4-0B51-994C-A8CD-B29EDAC62014}"/>
+                <a16:creationId xmlns:a16="http://schemas.microsoft.com/office/drawing/2014/main" id="{F7A51A2D-D6D4-8087-81EB-3A0136D8191B}"/>
               </a:ext>
             </a:extLst>
           </p:cNvPr>
@@ -3362,7 +3362,7 @@
           <p:cNvPr id="4" name="TextBox 3">
             <a:extLst>
               <a:ext uri="{FF2B5EF4-FFF2-40B4-BE49-F238E27FC236}">
-                <a16:creationId xmlns:a16="http://schemas.microsoft.com/office/drawing/2014/main" id="{138CECD4-F00C-36D6-679A-77E64FD39828}"/>
+                <a16:creationId xmlns:a16="http://schemas.microsoft.com/office/drawing/2014/main" id="{7E054E25-3BC2-B29A-F1A1-BF2DC748D617}"/>
               </a:ext>
             </a:extLst>
           </p:cNvPr>
@@ -3395,7 +3395,7 @@
     </p:spTree>
     <p:extLst>
       <p:ext uri="{BB962C8B-B14F-4D97-AF65-F5344CB8AC3E}">
-        <p14:creationId xmlns:p14="http://schemas.microsoft.com/office/powerpoint/2010/main" val="3392116042"/>
+        <p14:creationId xmlns:p14="http://schemas.microsoft.com/office/powerpoint/2010/main" val="4152956239"/>
       </p:ext>
     </p:extLst>
   </p:cSld>
